--- a/public/lessons/year-6-maths/summer/week-30/retrieve-number-and-ratio/teaching-powerpoint-v1.pptx
+++ b/public/lessons/year-6-maths/summer/week-30/retrieve-number-and-ratio/teaching-powerpoint-v1.pptx
@@ -2,24 +2,24 @@
 <file path=ppt/presentation.xml><?xml version="1.0" encoding="utf-8"?>
 <p:presentation xmlns:p="http://schemas.openxmlformats.org/presentationml/2006/main">
   <p:sldMasterIdLst>
-    <p:sldMasterId xmlns:r="http://schemas.openxmlformats.org/officeDocument/2006/relationships" id="2147483648" r:id="Rda86a67c85384cd3"/>
+    <p:sldMasterId xmlns:r="http://schemas.openxmlformats.org/officeDocument/2006/relationships" id="2147483648" r:id="R4a6832a724604daf"/>
   </p:sldMasterIdLst>
   <p:notesMasterIdLst>
-    <p:notesMasterId xmlns:r="http://schemas.openxmlformats.org/officeDocument/2006/relationships" r:id="R6abaae57e1844b76"/>
+    <p:notesMasterId xmlns:r="http://schemas.openxmlformats.org/officeDocument/2006/relationships" r:id="R8077ed5565384cc1"/>
   </p:notesMasterIdLst>
   <p:sldIdLst>
-    <p:sldId xmlns:r="http://schemas.openxmlformats.org/officeDocument/2006/relationships" id="256" r:id="Rda7cc2d8aca946f2"/>
-    <p:sldId xmlns:r="http://schemas.openxmlformats.org/officeDocument/2006/relationships" id="257" r:id="R7eb1b0c524be4cf7"/>
-    <p:sldId xmlns:r="http://schemas.openxmlformats.org/officeDocument/2006/relationships" id="258" r:id="R831932bfa4b34785"/>
-    <p:sldId xmlns:r="http://schemas.openxmlformats.org/officeDocument/2006/relationships" id="259" r:id="R4064cbfa5b77492e"/>
-    <p:sldId xmlns:r="http://schemas.openxmlformats.org/officeDocument/2006/relationships" id="260" r:id="R71b329f9f98d4d18"/>
-    <p:sldId xmlns:r="http://schemas.openxmlformats.org/officeDocument/2006/relationships" id="261" r:id="R0099a72912af4c80"/>
-    <p:sldId xmlns:r="http://schemas.openxmlformats.org/officeDocument/2006/relationships" id="262" r:id="Rebf8a42fd39d4100"/>
-    <p:sldId xmlns:r="http://schemas.openxmlformats.org/officeDocument/2006/relationships" id="263" r:id="R4ad974b4c2e24b6f"/>
-    <p:sldId xmlns:r="http://schemas.openxmlformats.org/officeDocument/2006/relationships" id="264" r:id="R9a2de769276f4fbb"/>
-    <p:sldId xmlns:r="http://schemas.openxmlformats.org/officeDocument/2006/relationships" id="265" r:id="R55a9dc1a2ec44e3d"/>
-    <p:sldId xmlns:r="http://schemas.openxmlformats.org/officeDocument/2006/relationships" id="266" r:id="R33ecd99be8334d6a"/>
-    <p:sldId xmlns:r="http://schemas.openxmlformats.org/officeDocument/2006/relationships" id="267" r:id="R6b77107cb25d424c"/>
+    <p:sldId xmlns:r="http://schemas.openxmlformats.org/officeDocument/2006/relationships" id="256" r:id="R811f1b9f302545b6"/>
+    <p:sldId xmlns:r="http://schemas.openxmlformats.org/officeDocument/2006/relationships" id="257" r:id="R4048526443fe489b"/>
+    <p:sldId xmlns:r="http://schemas.openxmlformats.org/officeDocument/2006/relationships" id="258" r:id="R319d63c74a6641c5"/>
+    <p:sldId xmlns:r="http://schemas.openxmlformats.org/officeDocument/2006/relationships" id="259" r:id="R97ee4ca237274a92"/>
+    <p:sldId xmlns:r="http://schemas.openxmlformats.org/officeDocument/2006/relationships" id="260" r:id="R7f8de972a07a43bd"/>
+    <p:sldId xmlns:r="http://schemas.openxmlformats.org/officeDocument/2006/relationships" id="261" r:id="Rd51c5d7390884584"/>
+    <p:sldId xmlns:r="http://schemas.openxmlformats.org/officeDocument/2006/relationships" id="262" r:id="Rfeba12122d5a4a67"/>
+    <p:sldId xmlns:r="http://schemas.openxmlformats.org/officeDocument/2006/relationships" id="263" r:id="R57590d2b865349d1"/>
+    <p:sldId xmlns:r="http://schemas.openxmlformats.org/officeDocument/2006/relationships" id="264" r:id="Rbcb237bf82a6487e"/>
+    <p:sldId xmlns:r="http://schemas.openxmlformats.org/officeDocument/2006/relationships" id="265" r:id="R2ce011a9d89f4149"/>
+    <p:sldId xmlns:r="http://schemas.openxmlformats.org/officeDocument/2006/relationships" id="266" r:id="Rcb0845a4cd76436a"/>
+    <p:sldId xmlns:r="http://schemas.openxmlformats.org/officeDocument/2006/relationships" id="267" r:id="R72d8147e42404d15"/>
   </p:sldIdLst>
   <p:sldSz cx="12192000" cy="6858000"/>
   <p:notesSz cx="6858000" cy="9144000"/>
@@ -873,7 +873,7 @@
           <a:lstStyle xmlns:a="http://schemas.openxmlformats.org/drawingml/2006/main"/>
           <a:p xmlns:a="http://schemas.openxmlformats.org/drawingml/2006/main">
             <a:r>
-              <a:t>I do. Reveal the question, setup and each calculation stage one click at a time. Pupils watch before copying. Model answer: 3/4 or 0.75.</a:t>
+              <a:t>I do. Reveal the question, then reveal each mathematical change one click at a time. Point to the numbers and operation that changed before moving to the next line. Final answer: 3/4 or 0.75.</a:t>
             </a:r>
           </a:p>
         </p:txBody>
@@ -1291,7 +1291,7 @@
   </p:cSld>
   <p:clrMap bg1="lt1" tx1="dk1" bg2="lt2" tx2="dk2" accent1="accent1" accent2="accent2" accent3="accent3" accent4="accent4" accent5="accent5" accent6="accent6" hlink="hlink" folHlink="folHlink"/>
   <p:sldLayoutIdLst>
-    <p:sldLayoutId xmlns:r="http://schemas.openxmlformats.org/officeDocument/2006/relationships" id="2147483649" r:id="Rf5aa3a05a9814fb3"/>
+    <p:sldLayoutId xmlns:r="http://schemas.openxmlformats.org/officeDocument/2006/relationships" id="2147483649" r:id="Rfa132d93a58c4e4d"/>
   </p:sldLayoutIdLst>
   <p:txStyles>
     <p:titleStyle>
@@ -1842,7 +1842,7 @@
           <p:cNvPr id="12" name="">
             <a:extLst xmlns:a="http://schemas.openxmlformats.org/drawingml/2006/main">
               <a:ext uri="{FF2B5EF4-FFF2-40B4-BE49-F238E27FC236}">
-                <a16:creationId xmlns:a16="http://schemas.microsoft.com/office/drawing/2014/main" id="{C935BA86-957B-4E11-B090-B06365315FFB}"/>
+                <a16:creationId xmlns:a16="http://schemas.microsoft.com/office/drawing/2014/main" id="{3405C04C-B446-4C37-AD2A-7407549CE020}"/>
               </a:ext>
             </a:extLst>
           </p:cNvPr>
@@ -1874,7 +1874,7 @@
           <p:cNvPr id="2" name="">
             <a:extLst xmlns:a="http://schemas.openxmlformats.org/drawingml/2006/main">
               <a:ext uri="{FF2B5EF4-FFF2-40B4-BE49-F238E27FC236}">
-                <a16:creationId xmlns:a16="http://schemas.microsoft.com/office/drawing/2014/main" id="{BC918108-6BF4-4CC9-A887-8895615E61CF}"/>
+                <a16:creationId xmlns:a16="http://schemas.microsoft.com/office/drawing/2014/main" id="{C35428C1-ADC9-482B-8D36-5383A0CD47CA}"/>
               </a:ext>
             </a:extLst>
           </p:cNvPr>
@@ -1931,7 +1931,7 @@
           <p:cNvPr id="3" name="">
             <a:extLst xmlns:a="http://schemas.openxmlformats.org/drawingml/2006/main">
               <a:ext uri="{FF2B5EF4-FFF2-40B4-BE49-F238E27FC236}">
-                <a16:creationId xmlns:a16="http://schemas.microsoft.com/office/drawing/2014/main" id="{EE17523B-822B-45FB-9F2A-F3CB903D0620}"/>
+                <a16:creationId xmlns:a16="http://schemas.microsoft.com/office/drawing/2014/main" id="{726314D4-EC14-4A61-B0BA-C2A1B8356EA7}"/>
               </a:ext>
             </a:extLst>
           </p:cNvPr>
@@ -1965,7 +1965,7 @@
           <p:cNvPr id="4" name="">
             <a:extLst xmlns:a="http://schemas.openxmlformats.org/drawingml/2006/main">
               <a:ext uri="{FF2B5EF4-FFF2-40B4-BE49-F238E27FC236}">
-                <a16:creationId xmlns:a16="http://schemas.microsoft.com/office/drawing/2014/main" id="{8C19938D-0F33-4426-B8F7-55A45BA87DD7}"/>
+                <a16:creationId xmlns:a16="http://schemas.microsoft.com/office/drawing/2014/main" id="{99E95D73-A2C3-4493-A36C-6F1DD0EF63B2}"/>
               </a:ext>
             </a:extLst>
           </p:cNvPr>
@@ -2022,7 +2022,7 @@
           <p:cNvPr id="5" name="">
             <a:extLst xmlns:a="http://schemas.openxmlformats.org/drawingml/2006/main">
               <a:ext uri="{FF2B5EF4-FFF2-40B4-BE49-F238E27FC236}">
-                <a16:creationId xmlns:a16="http://schemas.microsoft.com/office/drawing/2014/main" id="{C523277B-5075-4186-8631-F660E687723B}"/>
+                <a16:creationId xmlns:a16="http://schemas.microsoft.com/office/drawing/2014/main" id="{3A064C2A-0004-4789-B102-FA39018EDE44}"/>
               </a:ext>
             </a:extLst>
           </p:cNvPr>
@@ -2079,7 +2079,7 @@
           <p:cNvPr id="6" name="">
             <a:extLst xmlns:a="http://schemas.openxmlformats.org/drawingml/2006/main">
               <a:ext uri="{FF2B5EF4-FFF2-40B4-BE49-F238E27FC236}">
-                <a16:creationId xmlns:a16="http://schemas.microsoft.com/office/drawing/2014/main" id="{2C72C185-2984-4998-B629-B55049069D45}"/>
+                <a16:creationId xmlns:a16="http://schemas.microsoft.com/office/drawing/2014/main" id="{6EC549F9-19FD-45D9-8110-5A9EB37BF3EA}"/>
               </a:ext>
             </a:extLst>
           </p:cNvPr>
@@ -2113,7 +2113,7 @@
           <p:cNvPr id="7" name="">
             <a:extLst xmlns:a="http://schemas.openxmlformats.org/drawingml/2006/main">
               <a:ext uri="{FF2B5EF4-FFF2-40B4-BE49-F238E27FC236}">
-                <a16:creationId xmlns:a16="http://schemas.microsoft.com/office/drawing/2014/main" id="{5417CDE0-A704-4007-BDF7-9617BB4547A1}"/>
+                <a16:creationId xmlns:a16="http://schemas.microsoft.com/office/drawing/2014/main" id="{4B258353-E0F8-49EA-BB8A-14E2136410D9}"/>
               </a:ext>
             </a:extLst>
           </p:cNvPr>
@@ -2170,7 +2170,7 @@
           <p:cNvPr id="8" name="">
             <a:extLst xmlns:a="http://schemas.openxmlformats.org/drawingml/2006/main">
               <a:ext uri="{FF2B5EF4-FFF2-40B4-BE49-F238E27FC236}">
-                <a16:creationId xmlns:a16="http://schemas.microsoft.com/office/drawing/2014/main" id="{788BA08F-DDF3-40E4-BD14-E4F84917D789}"/>
+                <a16:creationId xmlns:a16="http://schemas.microsoft.com/office/drawing/2014/main" id="{23CB4056-3E4C-44D7-BBF5-4E28A5B553F1}"/>
               </a:ext>
             </a:extLst>
           </p:cNvPr>
@@ -2227,7 +2227,7 @@
           <p:cNvPr id="9" name="">
             <a:extLst xmlns:a="http://schemas.openxmlformats.org/drawingml/2006/main">
               <a:ext uri="{FF2B5EF4-FFF2-40B4-BE49-F238E27FC236}">
-                <a16:creationId xmlns:a16="http://schemas.microsoft.com/office/drawing/2014/main" id="{60115D41-3483-4903-A0B5-755201E84293}"/>
+                <a16:creationId xmlns:a16="http://schemas.microsoft.com/office/drawing/2014/main" id="{D79AFCF0-C698-43A6-B7EE-C7B7EAAAA1A5}"/>
               </a:ext>
             </a:extLst>
           </p:cNvPr>
@@ -2284,7 +2284,7 @@
           <p:cNvPr id="10" name="">
             <a:extLst xmlns:a="http://schemas.openxmlformats.org/drawingml/2006/main">
               <a:ext uri="{FF2B5EF4-FFF2-40B4-BE49-F238E27FC236}">
-                <a16:creationId xmlns:a16="http://schemas.microsoft.com/office/drawing/2014/main" id="{27C6F42A-2AED-4700-84F0-6A0BB9F95BFD}"/>
+                <a16:creationId xmlns:a16="http://schemas.microsoft.com/office/drawing/2014/main" id="{742AA6EF-188D-48DC-934D-6310FD63C10F}"/>
               </a:ext>
             </a:extLst>
           </p:cNvPr>
@@ -2341,7 +2341,7 @@
           <p:cNvPr id="11" name="">
             <a:extLst xmlns:a="http://schemas.openxmlformats.org/drawingml/2006/main">
               <a:ext uri="{FF2B5EF4-FFF2-40B4-BE49-F238E27FC236}">
-                <a16:creationId xmlns:a16="http://schemas.microsoft.com/office/drawing/2014/main" id="{AFD87D8E-BA6D-4B9E-974E-5636F00BBF85}"/>
+                <a16:creationId xmlns:a16="http://schemas.microsoft.com/office/drawing/2014/main" id="{CEDA06F0-C6CA-4220-BFB1-4763BE485F80}"/>
               </a:ext>
             </a:extLst>
           </p:cNvPr>
@@ -2396,7 +2396,7 @@
     </p:spTree>
     <p:extLst>
       <p:ext uri="{BB962C8B-B14F-4D97-AF65-F5344CB8AC3E}">
-        <p14:creationId xmlns:p14="http://schemas.microsoft.com/office/powerpoint/2010/main" val="1018088040"/>
+        <p14:creationId xmlns:p14="http://schemas.microsoft.com/office/powerpoint/2010/main" val="1982251105"/>
       </p:ext>
     </p:extLst>
   </p:cSld>
@@ -2427,7 +2427,7 @@
           <p:cNvPr id="14" name="">
             <a:extLst xmlns:a="http://schemas.openxmlformats.org/drawingml/2006/main">
               <a:ext uri="{FF2B5EF4-FFF2-40B4-BE49-F238E27FC236}">
-                <a16:creationId xmlns:a16="http://schemas.microsoft.com/office/drawing/2014/main" id="{304BD945-88B3-429F-A4B0-235EE79E2DB0}"/>
+                <a16:creationId xmlns:a16="http://schemas.microsoft.com/office/drawing/2014/main" id="{4C73012F-6D36-4AFE-BD5B-EFEB1E5DD0AA}"/>
               </a:ext>
             </a:extLst>
           </p:cNvPr>
@@ -2459,7 +2459,7 @@
           <p:cNvPr id="2" name="">
             <a:extLst xmlns:a="http://schemas.openxmlformats.org/drawingml/2006/main">
               <a:ext uri="{FF2B5EF4-FFF2-40B4-BE49-F238E27FC236}">
-                <a16:creationId xmlns:a16="http://schemas.microsoft.com/office/drawing/2014/main" id="{A1C87B68-CBF4-4DFA-986D-10609E152447}"/>
+                <a16:creationId xmlns:a16="http://schemas.microsoft.com/office/drawing/2014/main" id="{C13BB8B4-922F-4B07-AEE5-350CD999B9F5}"/>
               </a:ext>
             </a:extLst>
           </p:cNvPr>
@@ -2516,7 +2516,7 @@
           <p:cNvPr id="3" name="">
             <a:extLst xmlns:a="http://schemas.openxmlformats.org/drawingml/2006/main">
               <a:ext uri="{FF2B5EF4-FFF2-40B4-BE49-F238E27FC236}">
-                <a16:creationId xmlns:a16="http://schemas.microsoft.com/office/drawing/2014/main" id="{695DEC93-6AF9-4B79-9D4B-218ACA73762F}"/>
+                <a16:creationId xmlns:a16="http://schemas.microsoft.com/office/drawing/2014/main" id="{943C0B0A-146B-44AB-94BC-B413840386D9}"/>
               </a:ext>
             </a:extLst>
           </p:cNvPr>
@@ -2548,7 +2548,7 @@
           <p:cNvPr id="4" name="">
             <a:extLst xmlns:a="http://schemas.openxmlformats.org/drawingml/2006/main">
               <a:ext uri="{FF2B5EF4-FFF2-40B4-BE49-F238E27FC236}">
-                <a16:creationId xmlns:a16="http://schemas.microsoft.com/office/drawing/2014/main" id="{C6A897E3-F834-48E4-A46E-1BF493256104}"/>
+                <a16:creationId xmlns:a16="http://schemas.microsoft.com/office/drawing/2014/main" id="{26008A10-7ED8-4D29-9542-D54E5E57AF52}"/>
               </a:ext>
             </a:extLst>
           </p:cNvPr>
@@ -2605,7 +2605,7 @@
           <p:cNvPr id="5" name="">
             <a:extLst xmlns:a="http://schemas.openxmlformats.org/drawingml/2006/main">
               <a:ext uri="{FF2B5EF4-FFF2-40B4-BE49-F238E27FC236}">
-                <a16:creationId xmlns:a16="http://schemas.microsoft.com/office/drawing/2014/main" id="{80E11D1A-C9D5-4D66-BBBE-70C673CE9B68}"/>
+                <a16:creationId xmlns:a16="http://schemas.microsoft.com/office/drawing/2014/main" id="{9BCBB23A-E71C-48C2-9864-189ECF79573C}"/>
               </a:ext>
             </a:extLst>
           </p:cNvPr>
@@ -2662,7 +2662,7 @@
           <p:cNvPr id="6" name="">
             <a:extLst xmlns:a="http://schemas.openxmlformats.org/drawingml/2006/main">
               <a:ext uri="{FF2B5EF4-FFF2-40B4-BE49-F238E27FC236}">
-                <a16:creationId xmlns:a16="http://schemas.microsoft.com/office/drawing/2014/main" id="{D8CE8554-AB0D-4972-A147-FC73A9430F1E}"/>
+                <a16:creationId xmlns:a16="http://schemas.microsoft.com/office/drawing/2014/main" id="{95E170EC-1E88-4BE7-87CA-F9BD72338B84}"/>
               </a:ext>
             </a:extLst>
           </p:cNvPr>
@@ -2719,7 +2719,7 @@
           <p:cNvPr id="7" name="">
             <a:extLst xmlns:a="http://schemas.openxmlformats.org/drawingml/2006/main">
               <a:ext uri="{FF2B5EF4-FFF2-40B4-BE49-F238E27FC236}">
-                <a16:creationId xmlns:a16="http://schemas.microsoft.com/office/drawing/2014/main" id="{D74A61B6-F30E-4175-9DBC-7EE806FA5E29}"/>
+                <a16:creationId xmlns:a16="http://schemas.microsoft.com/office/drawing/2014/main" id="{DC4ED9A1-F7C9-4C33-93D4-7F193E6329AB}"/>
               </a:ext>
             </a:extLst>
           </p:cNvPr>
@@ -2751,7 +2751,7 @@
           <p:cNvPr id="8" name="">
             <a:extLst xmlns:a="http://schemas.openxmlformats.org/drawingml/2006/main">
               <a:ext uri="{FF2B5EF4-FFF2-40B4-BE49-F238E27FC236}">
-                <a16:creationId xmlns:a16="http://schemas.microsoft.com/office/drawing/2014/main" id="{A1CB4995-A493-4074-BCA1-9350F21CBB86}"/>
+                <a16:creationId xmlns:a16="http://schemas.microsoft.com/office/drawing/2014/main" id="{6568F866-71F8-46EF-8870-D660FD0C7A10}"/>
               </a:ext>
             </a:extLst>
           </p:cNvPr>
@@ -2808,7 +2808,7 @@
           <p:cNvPr id="9" name="">
             <a:extLst xmlns:a="http://schemas.openxmlformats.org/drawingml/2006/main">
               <a:ext uri="{FF2B5EF4-FFF2-40B4-BE49-F238E27FC236}">
-                <a16:creationId xmlns:a16="http://schemas.microsoft.com/office/drawing/2014/main" id="{6639CADC-3DC9-4CA5-A2B0-8B0A34A3FEEF}"/>
+                <a16:creationId xmlns:a16="http://schemas.microsoft.com/office/drawing/2014/main" id="{48461BE6-2CF6-4312-94D0-01DA5C1C80D2}"/>
               </a:ext>
             </a:extLst>
           </p:cNvPr>
@@ -2865,7 +2865,7 @@
           <p:cNvPr id="10" name="">
             <a:extLst xmlns:a="http://schemas.openxmlformats.org/drawingml/2006/main">
               <a:ext uri="{FF2B5EF4-FFF2-40B4-BE49-F238E27FC236}">
-                <a16:creationId xmlns:a16="http://schemas.microsoft.com/office/drawing/2014/main" id="{5EDA304D-9240-4C97-87F4-13C435AF4BD5}"/>
+                <a16:creationId xmlns:a16="http://schemas.microsoft.com/office/drawing/2014/main" id="{3E7187FE-87C0-4362-91F9-A137B6D877ED}"/>
               </a:ext>
             </a:extLst>
           </p:cNvPr>
@@ -2922,7 +2922,7 @@
           <p:cNvPr id="11" name="">
             <a:extLst xmlns:a="http://schemas.openxmlformats.org/drawingml/2006/main">
               <a:ext uri="{FF2B5EF4-FFF2-40B4-BE49-F238E27FC236}">
-                <a16:creationId xmlns:a16="http://schemas.microsoft.com/office/drawing/2014/main" id="{50BF97BB-D55C-4A5B-A9AC-FE19FC55AFEA}"/>
+                <a16:creationId xmlns:a16="http://schemas.microsoft.com/office/drawing/2014/main" id="{BB53F593-219A-4057-B047-8497A5F582B2}"/>
               </a:ext>
             </a:extLst>
           </p:cNvPr>
@@ -2979,7 +2979,7 @@
           <p:cNvPr id="12" name="">
             <a:extLst xmlns:a="http://schemas.openxmlformats.org/drawingml/2006/main">
               <a:ext uri="{FF2B5EF4-FFF2-40B4-BE49-F238E27FC236}">
-                <a16:creationId xmlns:a16="http://schemas.microsoft.com/office/drawing/2014/main" id="{89D1CFC7-4AC2-4379-9759-B8C5104B0938}"/>
+                <a16:creationId xmlns:a16="http://schemas.microsoft.com/office/drawing/2014/main" id="{F18DF441-57C8-4C5C-BB36-CC74AB172901}"/>
               </a:ext>
             </a:extLst>
           </p:cNvPr>
@@ -3036,7 +3036,7 @@
           <p:cNvPr id="13" name="">
             <a:extLst xmlns:a="http://schemas.openxmlformats.org/drawingml/2006/main">
               <a:ext uri="{FF2B5EF4-FFF2-40B4-BE49-F238E27FC236}">
-                <a16:creationId xmlns:a16="http://schemas.microsoft.com/office/drawing/2014/main" id="{AEDA94E9-08E3-4175-8230-072082B8F78B}"/>
+                <a16:creationId xmlns:a16="http://schemas.microsoft.com/office/drawing/2014/main" id="{7691A9FB-A43E-44A0-A456-CFF3EAD53706}"/>
               </a:ext>
             </a:extLst>
           </p:cNvPr>
@@ -3091,7 +3091,7 @@
     </p:spTree>
     <p:extLst>
       <p:ext uri="{BB962C8B-B14F-4D97-AF65-F5344CB8AC3E}">
-        <p14:creationId xmlns:p14="http://schemas.microsoft.com/office/powerpoint/2010/main" val="364913297"/>
+        <p14:creationId xmlns:p14="http://schemas.microsoft.com/office/powerpoint/2010/main" val="951686913"/>
       </p:ext>
     </p:extLst>
   </p:cSld>
@@ -3292,7 +3292,7 @@
           <p:cNvPr id="19" name="">
             <a:extLst xmlns:a="http://schemas.openxmlformats.org/drawingml/2006/main">
               <a:ext uri="{FF2B5EF4-FFF2-40B4-BE49-F238E27FC236}">
-                <a16:creationId xmlns:a16="http://schemas.microsoft.com/office/drawing/2014/main" id="{09F6DF67-8CC3-4325-9403-78C2BA266602}"/>
+                <a16:creationId xmlns:a16="http://schemas.microsoft.com/office/drawing/2014/main" id="{24229F34-C0D7-44A4-A668-D6DE4306E304}"/>
               </a:ext>
             </a:extLst>
           </p:cNvPr>
@@ -3324,7 +3324,7 @@
           <p:cNvPr id="2" name="">
             <a:extLst xmlns:a="http://schemas.openxmlformats.org/drawingml/2006/main">
               <a:ext uri="{FF2B5EF4-FFF2-40B4-BE49-F238E27FC236}">
-                <a16:creationId xmlns:a16="http://schemas.microsoft.com/office/drawing/2014/main" id="{2721847A-4250-45D1-8EE9-75F6DC07E3FD}"/>
+                <a16:creationId xmlns:a16="http://schemas.microsoft.com/office/drawing/2014/main" id="{72FA032B-71B5-472F-9031-8F455A4ED3DE}"/>
               </a:ext>
             </a:extLst>
           </p:cNvPr>
@@ -3381,7 +3381,7 @@
           <p:cNvPr id="3" name="">
             <a:extLst xmlns:a="http://schemas.openxmlformats.org/drawingml/2006/main">
               <a:ext uri="{FF2B5EF4-FFF2-40B4-BE49-F238E27FC236}">
-                <a16:creationId xmlns:a16="http://schemas.microsoft.com/office/drawing/2014/main" id="{B7684DDF-6976-418E-BD7A-5EF311F37605}"/>
+                <a16:creationId xmlns:a16="http://schemas.microsoft.com/office/drawing/2014/main" id="{A48345F9-3780-4EF1-B8FB-39DB9221286A}"/>
               </a:ext>
             </a:extLst>
           </p:cNvPr>
@@ -3413,7 +3413,7 @@
           <p:cNvPr id="4" name="">
             <a:extLst xmlns:a="http://schemas.openxmlformats.org/drawingml/2006/main">
               <a:ext uri="{FF2B5EF4-FFF2-40B4-BE49-F238E27FC236}">
-                <a16:creationId xmlns:a16="http://schemas.microsoft.com/office/drawing/2014/main" id="{7A593F75-9B5C-4097-A4F6-8F8501958F20}"/>
+                <a16:creationId xmlns:a16="http://schemas.microsoft.com/office/drawing/2014/main" id="{9F0075B8-0D06-4C71-99DA-B94F3E5AAA66}"/>
               </a:ext>
             </a:extLst>
           </p:cNvPr>
@@ -3470,7 +3470,7 @@
           <p:cNvPr id="5" name="">
             <a:extLst xmlns:a="http://schemas.openxmlformats.org/drawingml/2006/main">
               <a:ext uri="{FF2B5EF4-FFF2-40B4-BE49-F238E27FC236}">
-                <a16:creationId xmlns:a16="http://schemas.microsoft.com/office/drawing/2014/main" id="{6F978BA5-9A47-4987-9247-A95DA9A08687}"/>
+                <a16:creationId xmlns:a16="http://schemas.microsoft.com/office/drawing/2014/main" id="{EA7F5E33-E969-472A-9064-287DA26CF2E3}"/>
               </a:ext>
             </a:extLst>
           </p:cNvPr>
@@ -3527,7 +3527,7 @@
           <p:cNvPr id="6" name="">
             <a:extLst xmlns:a="http://schemas.openxmlformats.org/drawingml/2006/main">
               <a:ext uri="{FF2B5EF4-FFF2-40B4-BE49-F238E27FC236}">
-                <a16:creationId xmlns:a16="http://schemas.microsoft.com/office/drawing/2014/main" id="{8E457BB2-DBE6-4D84-BA4D-162CEEEEC110}"/>
+                <a16:creationId xmlns:a16="http://schemas.microsoft.com/office/drawing/2014/main" id="{78361EB3-D9FF-4CC8-8910-394AFEBEDA48}"/>
               </a:ext>
             </a:extLst>
           </p:cNvPr>
@@ -3584,7 +3584,7 @@
           <p:cNvPr id="7" name="">
             <a:extLst xmlns:a="http://schemas.openxmlformats.org/drawingml/2006/main">
               <a:ext uri="{FF2B5EF4-FFF2-40B4-BE49-F238E27FC236}">
-                <a16:creationId xmlns:a16="http://schemas.microsoft.com/office/drawing/2014/main" id="{A24B8982-DACE-4E14-A263-255AAC5C5DD8}"/>
+                <a16:creationId xmlns:a16="http://schemas.microsoft.com/office/drawing/2014/main" id="{E6D40F7F-0DEE-4B3D-B18B-EEEF178CCF18}"/>
               </a:ext>
             </a:extLst>
           </p:cNvPr>
@@ -3616,7 +3616,7 @@
           <p:cNvPr id="8" name="">
             <a:extLst xmlns:a="http://schemas.openxmlformats.org/drawingml/2006/main">
               <a:ext uri="{FF2B5EF4-FFF2-40B4-BE49-F238E27FC236}">
-                <a16:creationId xmlns:a16="http://schemas.microsoft.com/office/drawing/2014/main" id="{4F6D2543-31B4-4300-A96A-D5FBDA37440B}"/>
+                <a16:creationId xmlns:a16="http://schemas.microsoft.com/office/drawing/2014/main" id="{9915EB3A-73A6-4D6D-834C-35F026ECED27}"/>
               </a:ext>
             </a:extLst>
           </p:cNvPr>
@@ -3673,7 +3673,7 @@
           <p:cNvPr id="9" name="">
             <a:extLst xmlns:a="http://schemas.openxmlformats.org/drawingml/2006/main">
               <a:ext uri="{FF2B5EF4-FFF2-40B4-BE49-F238E27FC236}">
-                <a16:creationId xmlns:a16="http://schemas.microsoft.com/office/drawing/2014/main" id="{E2863776-58C7-4086-8BBA-3DF89F5D7DC9}"/>
+                <a16:creationId xmlns:a16="http://schemas.microsoft.com/office/drawing/2014/main" id="{E341CC2A-ACFE-4ADB-B6DD-48F56E4310A1}"/>
               </a:ext>
             </a:extLst>
           </p:cNvPr>
@@ -3730,7 +3730,7 @@
           <p:cNvPr id="10" name="">
             <a:extLst xmlns:a="http://schemas.openxmlformats.org/drawingml/2006/main">
               <a:ext uri="{FF2B5EF4-FFF2-40B4-BE49-F238E27FC236}">
-                <a16:creationId xmlns:a16="http://schemas.microsoft.com/office/drawing/2014/main" id="{52927180-6F49-40F6-8EA4-8B6B2560F0AE}"/>
+                <a16:creationId xmlns:a16="http://schemas.microsoft.com/office/drawing/2014/main" id="{9E25F181-91BD-474D-A89A-6B2BC2A5734A}"/>
               </a:ext>
             </a:extLst>
           </p:cNvPr>
@@ -3787,7 +3787,7 @@
           <p:cNvPr id="11" name="">
             <a:extLst xmlns:a="http://schemas.openxmlformats.org/drawingml/2006/main">
               <a:ext uri="{FF2B5EF4-FFF2-40B4-BE49-F238E27FC236}">
-                <a16:creationId xmlns:a16="http://schemas.microsoft.com/office/drawing/2014/main" id="{9FCEBF84-8E46-4BC5-B18D-65DD5441960F}"/>
+                <a16:creationId xmlns:a16="http://schemas.microsoft.com/office/drawing/2014/main" id="{D979AFE7-5BBE-4973-A56E-3C5C62B5B217}"/>
               </a:ext>
             </a:extLst>
           </p:cNvPr>
@@ -3821,7 +3821,7 @@
           <p:cNvPr id="12" name="">
             <a:extLst xmlns:a="http://schemas.openxmlformats.org/drawingml/2006/main">
               <a:ext uri="{FF2B5EF4-FFF2-40B4-BE49-F238E27FC236}">
-                <a16:creationId xmlns:a16="http://schemas.microsoft.com/office/drawing/2014/main" id="{9D7BCAC9-F2D6-4ABA-81D2-EDAF4FAF39C0}"/>
+                <a16:creationId xmlns:a16="http://schemas.microsoft.com/office/drawing/2014/main" id="{10F3FF9B-33E3-48FA-ACCE-B7D83E7C8FE6}"/>
               </a:ext>
             </a:extLst>
           </p:cNvPr>
@@ -3878,7 +3878,7 @@
           <p:cNvPr id="13" name="">
             <a:extLst xmlns:a="http://schemas.openxmlformats.org/drawingml/2006/main">
               <a:ext uri="{FF2B5EF4-FFF2-40B4-BE49-F238E27FC236}">
-                <a16:creationId xmlns:a16="http://schemas.microsoft.com/office/drawing/2014/main" id="{4F496468-72E0-4314-94AD-E3FD8D427EEC}"/>
+                <a16:creationId xmlns:a16="http://schemas.microsoft.com/office/drawing/2014/main" id="{F5F34A73-7DC3-4108-97EF-9319626CFB75}"/>
               </a:ext>
             </a:extLst>
           </p:cNvPr>
@@ -3935,7 +3935,7 @@
           <p:cNvPr id="14" name="">
             <a:extLst xmlns:a="http://schemas.openxmlformats.org/drawingml/2006/main">
               <a:ext uri="{FF2B5EF4-FFF2-40B4-BE49-F238E27FC236}">
-                <a16:creationId xmlns:a16="http://schemas.microsoft.com/office/drawing/2014/main" id="{1E2C59CD-B0CC-43F4-897C-D9518B9AAF67}"/>
+                <a16:creationId xmlns:a16="http://schemas.microsoft.com/office/drawing/2014/main" id="{62F815C1-DA85-40A7-A050-B9644FFF04D5}"/>
               </a:ext>
             </a:extLst>
           </p:cNvPr>
@@ -3992,7 +3992,7 @@
           <p:cNvPr id="15" name="">
             <a:extLst xmlns:a="http://schemas.openxmlformats.org/drawingml/2006/main">
               <a:ext uri="{FF2B5EF4-FFF2-40B4-BE49-F238E27FC236}">
-                <a16:creationId xmlns:a16="http://schemas.microsoft.com/office/drawing/2014/main" id="{E04E408D-0EFB-4B88-B2F6-3C671F0915A2}"/>
+                <a16:creationId xmlns:a16="http://schemas.microsoft.com/office/drawing/2014/main" id="{04CBBDE8-38FA-44D3-9FBA-130DF3171511}"/>
               </a:ext>
             </a:extLst>
           </p:cNvPr>
@@ -4026,7 +4026,7 @@
           <p:cNvPr id="16" name="">
             <a:extLst xmlns:a="http://schemas.openxmlformats.org/drawingml/2006/main">
               <a:ext uri="{FF2B5EF4-FFF2-40B4-BE49-F238E27FC236}">
-                <a16:creationId xmlns:a16="http://schemas.microsoft.com/office/drawing/2014/main" id="{D4340300-9343-44A1-B1E7-DA8C5D25C772}"/>
+                <a16:creationId xmlns:a16="http://schemas.microsoft.com/office/drawing/2014/main" id="{910CA58D-C3A5-4773-9487-8923CEB62887}"/>
               </a:ext>
             </a:extLst>
           </p:cNvPr>
@@ -4083,7 +4083,7 @@
           <p:cNvPr id="17" name="">
             <a:extLst xmlns:a="http://schemas.openxmlformats.org/drawingml/2006/main">
               <a:ext uri="{FF2B5EF4-FFF2-40B4-BE49-F238E27FC236}">
-                <a16:creationId xmlns:a16="http://schemas.microsoft.com/office/drawing/2014/main" id="{4AC9868B-599E-47BE-873C-F9785063C9E0}"/>
+                <a16:creationId xmlns:a16="http://schemas.microsoft.com/office/drawing/2014/main" id="{D55E1864-5F79-4628-801A-F7BFD3731B77}"/>
               </a:ext>
             </a:extLst>
           </p:cNvPr>
@@ -4140,7 +4140,7 @@
           <p:cNvPr id="18" name="">
             <a:extLst xmlns:a="http://schemas.openxmlformats.org/drawingml/2006/main">
               <a:ext uri="{FF2B5EF4-FFF2-40B4-BE49-F238E27FC236}">
-                <a16:creationId xmlns:a16="http://schemas.microsoft.com/office/drawing/2014/main" id="{079F73BE-1309-4133-917D-A04BE03F6965}"/>
+                <a16:creationId xmlns:a16="http://schemas.microsoft.com/office/drawing/2014/main" id="{696A65DC-31A2-4454-9417-F343EC9F6972}"/>
               </a:ext>
             </a:extLst>
           </p:cNvPr>
@@ -4195,7 +4195,7 @@
     </p:spTree>
     <p:extLst>
       <p:ext uri="{BB962C8B-B14F-4D97-AF65-F5344CB8AC3E}">
-        <p14:creationId xmlns:p14="http://schemas.microsoft.com/office/powerpoint/2010/main" val="2006982622"/>
+        <p14:creationId xmlns:p14="http://schemas.microsoft.com/office/powerpoint/2010/main" val="232275897"/>
       </p:ext>
     </p:extLst>
   </p:cSld>
@@ -4350,7 +4350,7 @@
           <p:cNvPr id="23" name="">
             <a:extLst xmlns:a="http://schemas.openxmlformats.org/drawingml/2006/main">
               <a:ext uri="{FF2B5EF4-FFF2-40B4-BE49-F238E27FC236}">
-                <a16:creationId xmlns:a16="http://schemas.microsoft.com/office/drawing/2014/main" id="{78B31B00-6F6A-46C0-A3A8-281458074892}"/>
+                <a16:creationId xmlns:a16="http://schemas.microsoft.com/office/drawing/2014/main" id="{EB0E5DE0-9F97-4B0C-973E-C4361D91BABF}"/>
               </a:ext>
             </a:extLst>
           </p:cNvPr>
@@ -4382,7 +4382,7 @@
           <p:cNvPr id="2" name="">
             <a:extLst xmlns:a="http://schemas.openxmlformats.org/drawingml/2006/main">
               <a:ext uri="{FF2B5EF4-FFF2-40B4-BE49-F238E27FC236}">
-                <a16:creationId xmlns:a16="http://schemas.microsoft.com/office/drawing/2014/main" id="{3A9A77D1-4176-4757-AD36-95013833BFF2}"/>
+                <a16:creationId xmlns:a16="http://schemas.microsoft.com/office/drawing/2014/main" id="{02A64373-AC97-42E0-BB33-4B6FAA532FE8}"/>
               </a:ext>
             </a:extLst>
           </p:cNvPr>
@@ -4439,7 +4439,7 @@
           <p:cNvPr id="3" name="">
             <a:extLst xmlns:a="http://schemas.openxmlformats.org/drawingml/2006/main">
               <a:ext uri="{FF2B5EF4-FFF2-40B4-BE49-F238E27FC236}">
-                <a16:creationId xmlns:a16="http://schemas.microsoft.com/office/drawing/2014/main" id="{22361C49-2D8B-4717-B47C-3A45A3EA25AD}"/>
+                <a16:creationId xmlns:a16="http://schemas.microsoft.com/office/drawing/2014/main" id="{F2608578-E4A7-43E1-A474-6043B646B989}"/>
               </a:ext>
             </a:extLst>
           </p:cNvPr>
@@ -4471,7 +4471,7 @@
           <p:cNvPr id="4" name="">
             <a:extLst xmlns:a="http://schemas.openxmlformats.org/drawingml/2006/main">
               <a:ext uri="{FF2B5EF4-FFF2-40B4-BE49-F238E27FC236}">
-                <a16:creationId xmlns:a16="http://schemas.microsoft.com/office/drawing/2014/main" id="{646146B2-5AF9-4E00-9A6F-E118F9985D36}"/>
+                <a16:creationId xmlns:a16="http://schemas.microsoft.com/office/drawing/2014/main" id="{CA678DE3-4F58-4F5D-AA29-53CB287E2ED4}"/>
               </a:ext>
             </a:extLst>
           </p:cNvPr>
@@ -4528,7 +4528,7 @@
           <p:cNvPr id="5" name="">
             <a:extLst xmlns:a="http://schemas.openxmlformats.org/drawingml/2006/main">
               <a:ext uri="{FF2B5EF4-FFF2-40B4-BE49-F238E27FC236}">
-                <a16:creationId xmlns:a16="http://schemas.microsoft.com/office/drawing/2014/main" id="{0B527130-9A2E-43C7-BD30-6056BB58BE40}"/>
+                <a16:creationId xmlns:a16="http://schemas.microsoft.com/office/drawing/2014/main" id="{009937B3-C7C3-4389-AD7E-A04126B29E45}"/>
               </a:ext>
             </a:extLst>
           </p:cNvPr>
@@ -4585,7 +4585,7 @@
           <p:cNvPr id="6" name="">
             <a:extLst xmlns:a="http://schemas.openxmlformats.org/drawingml/2006/main">
               <a:ext uri="{FF2B5EF4-FFF2-40B4-BE49-F238E27FC236}">
-                <a16:creationId xmlns:a16="http://schemas.microsoft.com/office/drawing/2014/main" id="{F46C4C78-DAB7-4538-825B-65E6E1B04EFF}"/>
+                <a16:creationId xmlns:a16="http://schemas.microsoft.com/office/drawing/2014/main" id="{F4C456CD-E8B9-4A49-8A83-01F29054D047}"/>
               </a:ext>
             </a:extLst>
           </p:cNvPr>
@@ -4642,7 +4642,7 @@
           <p:cNvPr id="7" name="">
             <a:extLst xmlns:a="http://schemas.openxmlformats.org/drawingml/2006/main">
               <a:ext uri="{FF2B5EF4-FFF2-40B4-BE49-F238E27FC236}">
-                <a16:creationId xmlns:a16="http://schemas.microsoft.com/office/drawing/2014/main" id="{7648E835-10FD-4BF7-85DF-15A32D897AE1}"/>
+                <a16:creationId xmlns:a16="http://schemas.microsoft.com/office/drawing/2014/main" id="{A67CEB31-57D3-44B1-A67A-21E002D3DE9B}"/>
               </a:ext>
             </a:extLst>
           </p:cNvPr>
@@ -4674,7 +4674,7 @@
           <p:cNvPr id="8" name="">
             <a:extLst xmlns:a="http://schemas.openxmlformats.org/drawingml/2006/main">
               <a:ext uri="{FF2B5EF4-FFF2-40B4-BE49-F238E27FC236}">
-                <a16:creationId xmlns:a16="http://schemas.microsoft.com/office/drawing/2014/main" id="{0EF95288-6554-472D-9A5E-74F4A9063805}"/>
+                <a16:creationId xmlns:a16="http://schemas.microsoft.com/office/drawing/2014/main" id="{32E17FEB-C959-4EAC-AAD0-F68BCBC0C7B7}"/>
               </a:ext>
             </a:extLst>
           </p:cNvPr>
@@ -4731,7 +4731,7 @@
           <p:cNvPr id="9" name="">
             <a:extLst xmlns:a="http://schemas.openxmlformats.org/drawingml/2006/main">
               <a:ext uri="{FF2B5EF4-FFF2-40B4-BE49-F238E27FC236}">
-                <a16:creationId xmlns:a16="http://schemas.microsoft.com/office/drawing/2014/main" id="{6A6C7A0A-9EEC-4D14-AAE6-A1CC13189D95}"/>
+                <a16:creationId xmlns:a16="http://schemas.microsoft.com/office/drawing/2014/main" id="{E15B05AA-B0E1-440A-BB1D-2A952C04C339}"/>
               </a:ext>
             </a:extLst>
           </p:cNvPr>
@@ -4788,7 +4788,7 @@
           <p:cNvPr id="10" name="">
             <a:extLst xmlns:a="http://schemas.openxmlformats.org/drawingml/2006/main">
               <a:ext uri="{FF2B5EF4-FFF2-40B4-BE49-F238E27FC236}">
-                <a16:creationId xmlns:a16="http://schemas.microsoft.com/office/drawing/2014/main" id="{C04D42AC-4119-4267-B0B6-C4671FBC36E3}"/>
+                <a16:creationId xmlns:a16="http://schemas.microsoft.com/office/drawing/2014/main" id="{1F7E0B14-88AD-4CF3-8CAC-EC47E9475FDF}"/>
               </a:ext>
             </a:extLst>
           </p:cNvPr>
@@ -4822,7 +4822,7 @@
           <p:cNvPr id="11" name="">
             <a:extLst xmlns:a="http://schemas.openxmlformats.org/drawingml/2006/main">
               <a:ext uri="{FF2B5EF4-FFF2-40B4-BE49-F238E27FC236}">
-                <a16:creationId xmlns:a16="http://schemas.microsoft.com/office/drawing/2014/main" id="{47AD8CE6-01EC-45EF-8C68-2F9B482E4532}"/>
+                <a16:creationId xmlns:a16="http://schemas.microsoft.com/office/drawing/2014/main" id="{2E63C938-3D84-4126-AE55-C2FD3C405B3A}"/>
               </a:ext>
             </a:extLst>
           </p:cNvPr>
@@ -4854,7 +4854,7 @@
           <p:cNvPr id="12" name="">
             <a:extLst xmlns:a="http://schemas.openxmlformats.org/drawingml/2006/main">
               <a:ext uri="{FF2B5EF4-FFF2-40B4-BE49-F238E27FC236}">
-                <a16:creationId xmlns:a16="http://schemas.microsoft.com/office/drawing/2014/main" id="{AE7597FA-A13F-4A7B-B567-3CA54253AB85}"/>
+                <a16:creationId xmlns:a16="http://schemas.microsoft.com/office/drawing/2014/main" id="{DFE6654F-6BA2-44C9-8AC0-E28B9B8423D9}"/>
               </a:ext>
             </a:extLst>
           </p:cNvPr>
@@ -4911,7 +4911,7 @@
           <p:cNvPr id="13" name="">
             <a:extLst xmlns:a="http://schemas.openxmlformats.org/drawingml/2006/main">
               <a:ext uri="{FF2B5EF4-FFF2-40B4-BE49-F238E27FC236}">
-                <a16:creationId xmlns:a16="http://schemas.microsoft.com/office/drawing/2014/main" id="{B8E3F92D-147B-4063-B013-AA1BE6E739E5}"/>
+                <a16:creationId xmlns:a16="http://schemas.microsoft.com/office/drawing/2014/main" id="{4C9EF6CD-E2C2-4AA7-87F4-9C3B61C3AE7E}"/>
               </a:ext>
             </a:extLst>
           </p:cNvPr>
@@ -4968,7 +4968,7 @@
           <p:cNvPr id="14" name="">
             <a:extLst xmlns:a="http://schemas.openxmlformats.org/drawingml/2006/main">
               <a:ext uri="{FF2B5EF4-FFF2-40B4-BE49-F238E27FC236}">
-                <a16:creationId xmlns:a16="http://schemas.microsoft.com/office/drawing/2014/main" id="{3B9D746B-7945-46FC-BA18-F99B70130A55}"/>
+                <a16:creationId xmlns:a16="http://schemas.microsoft.com/office/drawing/2014/main" id="{40CF9FD0-1DDA-49A7-AA4F-E2D7738CEA70}"/>
               </a:ext>
             </a:extLst>
           </p:cNvPr>
@@ -5002,7 +5002,7 @@
           <p:cNvPr id="15" name="">
             <a:extLst xmlns:a="http://schemas.openxmlformats.org/drawingml/2006/main">
               <a:ext uri="{FF2B5EF4-FFF2-40B4-BE49-F238E27FC236}">
-                <a16:creationId xmlns:a16="http://schemas.microsoft.com/office/drawing/2014/main" id="{DB560BDE-7B5D-4516-B9C5-77B038F0D4F5}"/>
+                <a16:creationId xmlns:a16="http://schemas.microsoft.com/office/drawing/2014/main" id="{49B7E5D3-77E0-44DA-AD4E-9150ECFFBAC2}"/>
               </a:ext>
             </a:extLst>
           </p:cNvPr>
@@ -5034,7 +5034,7 @@
           <p:cNvPr id="16" name="">
             <a:extLst xmlns:a="http://schemas.openxmlformats.org/drawingml/2006/main">
               <a:ext uri="{FF2B5EF4-FFF2-40B4-BE49-F238E27FC236}">
-                <a16:creationId xmlns:a16="http://schemas.microsoft.com/office/drawing/2014/main" id="{67CA82D3-D747-49A2-9AB0-9D8396BDC61E}"/>
+                <a16:creationId xmlns:a16="http://schemas.microsoft.com/office/drawing/2014/main" id="{9C6B2781-8B48-498D-9BC3-D18C8B6E44C0}"/>
               </a:ext>
             </a:extLst>
           </p:cNvPr>
@@ -5091,7 +5091,7 @@
           <p:cNvPr id="17" name="">
             <a:extLst xmlns:a="http://schemas.openxmlformats.org/drawingml/2006/main">
               <a:ext uri="{FF2B5EF4-FFF2-40B4-BE49-F238E27FC236}">
-                <a16:creationId xmlns:a16="http://schemas.microsoft.com/office/drawing/2014/main" id="{81675BB9-EF9C-45C2-B01D-F8F4D5CC8CC4}"/>
+                <a16:creationId xmlns:a16="http://schemas.microsoft.com/office/drawing/2014/main" id="{30964619-4448-4C13-93E6-67FFD35BA395}"/>
               </a:ext>
             </a:extLst>
           </p:cNvPr>
@@ -5148,7 +5148,7 @@
           <p:cNvPr id="18" name="">
             <a:extLst xmlns:a="http://schemas.openxmlformats.org/drawingml/2006/main">
               <a:ext uri="{FF2B5EF4-FFF2-40B4-BE49-F238E27FC236}">
-                <a16:creationId xmlns:a16="http://schemas.microsoft.com/office/drawing/2014/main" id="{48362764-B2DD-4F44-BDDE-274567CFE09E}"/>
+                <a16:creationId xmlns:a16="http://schemas.microsoft.com/office/drawing/2014/main" id="{7156C6CE-1FA5-428D-94AE-1D8674C6A904}"/>
               </a:ext>
             </a:extLst>
           </p:cNvPr>
@@ -5182,7 +5182,7 @@
           <p:cNvPr id="19" name="">
             <a:extLst xmlns:a="http://schemas.openxmlformats.org/drawingml/2006/main">
               <a:ext uri="{FF2B5EF4-FFF2-40B4-BE49-F238E27FC236}">
-                <a16:creationId xmlns:a16="http://schemas.microsoft.com/office/drawing/2014/main" id="{10FFF544-9F01-475F-90F2-7B1919AA380B}"/>
+                <a16:creationId xmlns:a16="http://schemas.microsoft.com/office/drawing/2014/main" id="{27A7CF7E-70A5-4A49-AFDB-A9B448E3A1AB}"/>
               </a:ext>
             </a:extLst>
           </p:cNvPr>
@@ -5214,7 +5214,7 @@
           <p:cNvPr id="20" name="">
             <a:extLst xmlns:a="http://schemas.openxmlformats.org/drawingml/2006/main">
               <a:ext uri="{FF2B5EF4-FFF2-40B4-BE49-F238E27FC236}">
-                <a16:creationId xmlns:a16="http://schemas.microsoft.com/office/drawing/2014/main" id="{DD64F32D-D813-4F41-ABB6-7A5256C77C0E}"/>
+                <a16:creationId xmlns:a16="http://schemas.microsoft.com/office/drawing/2014/main" id="{CE108EAC-D1BB-40AE-A661-BD86B1A279B1}"/>
               </a:ext>
             </a:extLst>
           </p:cNvPr>
@@ -5271,7 +5271,7 @@
           <p:cNvPr id="21" name="">
             <a:extLst xmlns:a="http://schemas.openxmlformats.org/drawingml/2006/main">
               <a:ext uri="{FF2B5EF4-FFF2-40B4-BE49-F238E27FC236}">
-                <a16:creationId xmlns:a16="http://schemas.microsoft.com/office/drawing/2014/main" id="{8773E570-4C0B-45FA-B7C9-EA9511F65C43}"/>
+                <a16:creationId xmlns:a16="http://schemas.microsoft.com/office/drawing/2014/main" id="{0E506294-AA85-45DE-B9EC-82F09CCC976E}"/>
               </a:ext>
             </a:extLst>
           </p:cNvPr>
@@ -5328,7 +5328,7 @@
           <p:cNvPr id="22" name="">
             <a:extLst xmlns:a="http://schemas.openxmlformats.org/drawingml/2006/main">
               <a:ext uri="{FF2B5EF4-FFF2-40B4-BE49-F238E27FC236}">
-                <a16:creationId xmlns:a16="http://schemas.microsoft.com/office/drawing/2014/main" id="{2BF4B8E7-4106-499A-B731-570CD6031C4E}"/>
+                <a16:creationId xmlns:a16="http://schemas.microsoft.com/office/drawing/2014/main" id="{E2E56D44-6CA2-43E5-88BE-DB27DB518379}"/>
               </a:ext>
             </a:extLst>
           </p:cNvPr>
@@ -5383,7 +5383,7 @@
     </p:spTree>
     <p:extLst>
       <p:ext uri="{BB962C8B-B14F-4D97-AF65-F5344CB8AC3E}">
-        <p14:creationId xmlns:p14="http://schemas.microsoft.com/office/powerpoint/2010/main" val="736150930"/>
+        <p14:creationId xmlns:p14="http://schemas.microsoft.com/office/powerpoint/2010/main" val="1465963459"/>
       </p:ext>
     </p:extLst>
   </p:cSld>
@@ -5584,7 +5584,7 @@
           <p:cNvPr id="23" name="">
             <a:extLst xmlns:a="http://schemas.openxmlformats.org/drawingml/2006/main">
               <a:ext uri="{FF2B5EF4-FFF2-40B4-BE49-F238E27FC236}">
-                <a16:creationId xmlns:a16="http://schemas.microsoft.com/office/drawing/2014/main" id="{3A49CEA2-E24A-4D2A-9800-4DD1D45C3A1C}"/>
+                <a16:creationId xmlns:a16="http://schemas.microsoft.com/office/drawing/2014/main" id="{76C4FEEA-084C-4CAF-9D51-91A0C36D3E30}"/>
               </a:ext>
             </a:extLst>
           </p:cNvPr>
@@ -5616,7 +5616,7 @@
           <p:cNvPr id="2" name="">
             <a:extLst xmlns:a="http://schemas.openxmlformats.org/drawingml/2006/main">
               <a:ext uri="{FF2B5EF4-FFF2-40B4-BE49-F238E27FC236}">
-                <a16:creationId xmlns:a16="http://schemas.microsoft.com/office/drawing/2014/main" id="{A119EF40-AA19-4A2B-A7D7-0FBA1E0B0C28}"/>
+                <a16:creationId xmlns:a16="http://schemas.microsoft.com/office/drawing/2014/main" id="{BC721C11-E39D-4230-885F-A3B136E93F34}"/>
               </a:ext>
             </a:extLst>
           </p:cNvPr>
@@ -5673,7 +5673,7 @@
           <p:cNvPr id="3" name="">
             <a:extLst xmlns:a="http://schemas.openxmlformats.org/drawingml/2006/main">
               <a:ext uri="{FF2B5EF4-FFF2-40B4-BE49-F238E27FC236}">
-                <a16:creationId xmlns:a16="http://schemas.microsoft.com/office/drawing/2014/main" id="{EA9FC6F2-5AE8-481A-B493-C30B576BA0DE}"/>
+                <a16:creationId xmlns:a16="http://schemas.microsoft.com/office/drawing/2014/main" id="{1BA9D1C7-755F-4F26-BFB8-C564B670AEFA}"/>
               </a:ext>
             </a:extLst>
           </p:cNvPr>
@@ -5705,7 +5705,7 @@
           <p:cNvPr id="4" name="">
             <a:extLst xmlns:a="http://schemas.openxmlformats.org/drawingml/2006/main">
               <a:ext uri="{FF2B5EF4-FFF2-40B4-BE49-F238E27FC236}">
-                <a16:creationId xmlns:a16="http://schemas.microsoft.com/office/drawing/2014/main" id="{2D3981BF-D25E-407E-88DD-73B3AF67824E}"/>
+                <a16:creationId xmlns:a16="http://schemas.microsoft.com/office/drawing/2014/main" id="{9A5296BE-1D16-4C75-AEB0-7AA6F1913F06}"/>
               </a:ext>
             </a:extLst>
           </p:cNvPr>
@@ -5762,7 +5762,7 @@
           <p:cNvPr id="5" name="">
             <a:extLst xmlns:a="http://schemas.openxmlformats.org/drawingml/2006/main">
               <a:ext uri="{FF2B5EF4-FFF2-40B4-BE49-F238E27FC236}">
-                <a16:creationId xmlns:a16="http://schemas.microsoft.com/office/drawing/2014/main" id="{26C27EC0-38CF-429D-8E52-A42372F6E6C3}"/>
+                <a16:creationId xmlns:a16="http://schemas.microsoft.com/office/drawing/2014/main" id="{B6B03B67-62ED-4D01-B96E-6B290A4E3260}"/>
               </a:ext>
             </a:extLst>
           </p:cNvPr>
@@ -5819,7 +5819,7 @@
           <p:cNvPr id="6" name="">
             <a:extLst xmlns:a="http://schemas.openxmlformats.org/drawingml/2006/main">
               <a:ext uri="{FF2B5EF4-FFF2-40B4-BE49-F238E27FC236}">
-                <a16:creationId xmlns:a16="http://schemas.microsoft.com/office/drawing/2014/main" id="{1B82CB89-CC2C-441C-8218-48D787A79155}"/>
+                <a16:creationId xmlns:a16="http://schemas.microsoft.com/office/drawing/2014/main" id="{A141F752-0696-4A33-9482-1D3B82CF0DA1}"/>
               </a:ext>
             </a:extLst>
           </p:cNvPr>
@@ -5876,7 +5876,7 @@
           <p:cNvPr id="7" name="">
             <a:extLst xmlns:a="http://schemas.openxmlformats.org/drawingml/2006/main">
               <a:ext uri="{FF2B5EF4-FFF2-40B4-BE49-F238E27FC236}">
-                <a16:creationId xmlns:a16="http://schemas.microsoft.com/office/drawing/2014/main" id="{1FE60847-A298-411B-9971-DBFF48EEC45C}"/>
+                <a16:creationId xmlns:a16="http://schemas.microsoft.com/office/drawing/2014/main" id="{DB65CB88-2076-4926-9DB2-AD6167A76082}"/>
               </a:ext>
             </a:extLst>
           </p:cNvPr>
@@ -5908,7 +5908,7 @@
           <p:cNvPr id="8" name="">
             <a:extLst xmlns:a="http://schemas.openxmlformats.org/drawingml/2006/main">
               <a:ext uri="{FF2B5EF4-FFF2-40B4-BE49-F238E27FC236}">
-                <a16:creationId xmlns:a16="http://schemas.microsoft.com/office/drawing/2014/main" id="{F8B0AE64-6A56-47B3-ABC5-721E0339B923}"/>
+                <a16:creationId xmlns:a16="http://schemas.microsoft.com/office/drawing/2014/main" id="{51046C11-740C-4B6F-870D-D358E4F8CF4B}"/>
               </a:ext>
             </a:extLst>
           </p:cNvPr>
@@ -5965,7 +5965,7 @@
           <p:cNvPr id="9" name="">
             <a:extLst xmlns:a="http://schemas.openxmlformats.org/drawingml/2006/main">
               <a:ext uri="{FF2B5EF4-FFF2-40B4-BE49-F238E27FC236}">
-                <a16:creationId xmlns:a16="http://schemas.microsoft.com/office/drawing/2014/main" id="{E4783BD1-01C8-4795-8DB9-98177C24C4C9}"/>
+                <a16:creationId xmlns:a16="http://schemas.microsoft.com/office/drawing/2014/main" id="{F5378B6D-B0F2-4587-90AE-897777952856}"/>
               </a:ext>
             </a:extLst>
           </p:cNvPr>
@@ -6022,7 +6022,7 @@
           <p:cNvPr id="10" name="">
             <a:extLst xmlns:a="http://schemas.openxmlformats.org/drawingml/2006/main">
               <a:ext uri="{FF2B5EF4-FFF2-40B4-BE49-F238E27FC236}">
-                <a16:creationId xmlns:a16="http://schemas.microsoft.com/office/drawing/2014/main" id="{F8B76C17-B5AC-474C-B404-2FD6D4E2F695}"/>
+                <a16:creationId xmlns:a16="http://schemas.microsoft.com/office/drawing/2014/main" id="{19298C9C-82E7-4DEE-8DD1-3F8339EB8DA7}"/>
               </a:ext>
             </a:extLst>
           </p:cNvPr>
@@ -6056,7 +6056,7 @@
           <p:cNvPr id="11" name="">
             <a:extLst xmlns:a="http://schemas.openxmlformats.org/drawingml/2006/main">
               <a:ext uri="{FF2B5EF4-FFF2-40B4-BE49-F238E27FC236}">
-                <a16:creationId xmlns:a16="http://schemas.microsoft.com/office/drawing/2014/main" id="{CDA8D444-D039-4704-9E83-903F01A7B454}"/>
+                <a16:creationId xmlns:a16="http://schemas.microsoft.com/office/drawing/2014/main" id="{B91568A7-9B31-4BC6-BF84-43E3C9B85AF6}"/>
               </a:ext>
             </a:extLst>
           </p:cNvPr>
@@ -6088,7 +6088,7 @@
           <p:cNvPr id="12" name="">
             <a:extLst xmlns:a="http://schemas.openxmlformats.org/drawingml/2006/main">
               <a:ext uri="{FF2B5EF4-FFF2-40B4-BE49-F238E27FC236}">
-                <a16:creationId xmlns:a16="http://schemas.microsoft.com/office/drawing/2014/main" id="{EC8D92FB-01E6-465A-97C4-2E4A6911EEA6}"/>
+                <a16:creationId xmlns:a16="http://schemas.microsoft.com/office/drawing/2014/main" id="{08CCF936-DD17-48C5-A2E7-3D513B30A307}"/>
               </a:ext>
             </a:extLst>
           </p:cNvPr>
@@ -6145,7 +6145,7 @@
           <p:cNvPr id="13" name="">
             <a:extLst xmlns:a="http://schemas.openxmlformats.org/drawingml/2006/main">
               <a:ext uri="{FF2B5EF4-FFF2-40B4-BE49-F238E27FC236}">
-                <a16:creationId xmlns:a16="http://schemas.microsoft.com/office/drawing/2014/main" id="{76114C76-A212-45BC-92E2-E9F6DC947C3A}"/>
+                <a16:creationId xmlns:a16="http://schemas.microsoft.com/office/drawing/2014/main" id="{0347E579-5171-4002-8D46-E46BE108BE74}"/>
               </a:ext>
             </a:extLst>
           </p:cNvPr>
@@ -6202,7 +6202,7 @@
           <p:cNvPr id="14" name="">
             <a:extLst xmlns:a="http://schemas.openxmlformats.org/drawingml/2006/main">
               <a:ext uri="{FF2B5EF4-FFF2-40B4-BE49-F238E27FC236}">
-                <a16:creationId xmlns:a16="http://schemas.microsoft.com/office/drawing/2014/main" id="{391BCFE4-190E-49FF-9893-D5A351E7A545}"/>
+                <a16:creationId xmlns:a16="http://schemas.microsoft.com/office/drawing/2014/main" id="{0266A0CF-7148-4FF5-ABAF-66D6E4F3C141}"/>
               </a:ext>
             </a:extLst>
           </p:cNvPr>
@@ -6236,7 +6236,7 @@
           <p:cNvPr id="15" name="">
             <a:extLst xmlns:a="http://schemas.openxmlformats.org/drawingml/2006/main">
               <a:ext uri="{FF2B5EF4-FFF2-40B4-BE49-F238E27FC236}">
-                <a16:creationId xmlns:a16="http://schemas.microsoft.com/office/drawing/2014/main" id="{CF475FFF-D8B9-4739-87CA-853484957B30}"/>
+                <a16:creationId xmlns:a16="http://schemas.microsoft.com/office/drawing/2014/main" id="{2A718919-2781-482C-9B0B-797DB220FFE5}"/>
               </a:ext>
             </a:extLst>
           </p:cNvPr>
@@ -6268,7 +6268,7 @@
           <p:cNvPr id="16" name="">
             <a:extLst xmlns:a="http://schemas.openxmlformats.org/drawingml/2006/main">
               <a:ext uri="{FF2B5EF4-FFF2-40B4-BE49-F238E27FC236}">
-                <a16:creationId xmlns:a16="http://schemas.microsoft.com/office/drawing/2014/main" id="{BD50EBA3-11BC-4F0A-88DC-ED9C6E1CEF92}"/>
+                <a16:creationId xmlns:a16="http://schemas.microsoft.com/office/drawing/2014/main" id="{10229B53-D182-4A3B-92FD-5941D9EC719C}"/>
               </a:ext>
             </a:extLst>
           </p:cNvPr>
@@ -6325,7 +6325,7 @@
           <p:cNvPr id="17" name="">
             <a:extLst xmlns:a="http://schemas.openxmlformats.org/drawingml/2006/main">
               <a:ext uri="{FF2B5EF4-FFF2-40B4-BE49-F238E27FC236}">
-                <a16:creationId xmlns:a16="http://schemas.microsoft.com/office/drawing/2014/main" id="{210D2ED1-AACA-4E1E-8EFB-E912DD38BFB1}"/>
+                <a16:creationId xmlns:a16="http://schemas.microsoft.com/office/drawing/2014/main" id="{B526BDC0-DEAF-4CAD-87E1-9FC77F342013}"/>
               </a:ext>
             </a:extLst>
           </p:cNvPr>
@@ -6382,7 +6382,7 @@
           <p:cNvPr id="18" name="">
             <a:extLst xmlns:a="http://schemas.openxmlformats.org/drawingml/2006/main">
               <a:ext uri="{FF2B5EF4-FFF2-40B4-BE49-F238E27FC236}">
-                <a16:creationId xmlns:a16="http://schemas.microsoft.com/office/drawing/2014/main" id="{2370B065-FE33-45D7-BCCF-8EDE8345B085}"/>
+                <a16:creationId xmlns:a16="http://schemas.microsoft.com/office/drawing/2014/main" id="{D7778684-EB6C-4D6E-B6B7-6E3959D82781}"/>
               </a:ext>
             </a:extLst>
           </p:cNvPr>
@@ -6416,7 +6416,7 @@
           <p:cNvPr id="19" name="">
             <a:extLst xmlns:a="http://schemas.openxmlformats.org/drawingml/2006/main">
               <a:ext uri="{FF2B5EF4-FFF2-40B4-BE49-F238E27FC236}">
-                <a16:creationId xmlns:a16="http://schemas.microsoft.com/office/drawing/2014/main" id="{3B23396F-6182-4C02-BC84-8F07C3682816}"/>
+                <a16:creationId xmlns:a16="http://schemas.microsoft.com/office/drawing/2014/main" id="{AC4757E7-7582-4708-9075-7231D2DC1664}"/>
               </a:ext>
             </a:extLst>
           </p:cNvPr>
@@ -6448,7 +6448,7 @@
           <p:cNvPr id="20" name="">
             <a:extLst xmlns:a="http://schemas.openxmlformats.org/drawingml/2006/main">
               <a:ext uri="{FF2B5EF4-FFF2-40B4-BE49-F238E27FC236}">
-                <a16:creationId xmlns:a16="http://schemas.microsoft.com/office/drawing/2014/main" id="{00563677-1A00-4D5B-AF34-B6E49E338C4A}"/>
+                <a16:creationId xmlns:a16="http://schemas.microsoft.com/office/drawing/2014/main" id="{CBC1191D-0785-4CDB-B45D-A5D2EA037442}"/>
               </a:ext>
             </a:extLst>
           </p:cNvPr>
@@ -6505,7 +6505,7 @@
           <p:cNvPr id="21" name="">
             <a:extLst xmlns:a="http://schemas.openxmlformats.org/drawingml/2006/main">
               <a:ext uri="{FF2B5EF4-FFF2-40B4-BE49-F238E27FC236}">
-                <a16:creationId xmlns:a16="http://schemas.microsoft.com/office/drawing/2014/main" id="{2E7860E6-DE3D-41F2-9266-13A4A4FA5F48}"/>
+                <a16:creationId xmlns:a16="http://schemas.microsoft.com/office/drawing/2014/main" id="{82A833DC-628D-45E5-BB25-7D79B0A14EA1}"/>
               </a:ext>
             </a:extLst>
           </p:cNvPr>
@@ -6562,7 +6562,7 @@
           <p:cNvPr id="22" name="">
             <a:extLst xmlns:a="http://schemas.openxmlformats.org/drawingml/2006/main">
               <a:ext uri="{FF2B5EF4-FFF2-40B4-BE49-F238E27FC236}">
-                <a16:creationId xmlns:a16="http://schemas.microsoft.com/office/drawing/2014/main" id="{881EE924-643A-41D6-9DAE-3F0AE7AC82E6}"/>
+                <a16:creationId xmlns:a16="http://schemas.microsoft.com/office/drawing/2014/main" id="{F7C944DD-8604-48C9-87F6-50552EC5E81D}"/>
               </a:ext>
             </a:extLst>
           </p:cNvPr>
@@ -6617,7 +6617,7 @@
     </p:spTree>
     <p:extLst>
       <p:ext uri="{BB962C8B-B14F-4D97-AF65-F5344CB8AC3E}">
-        <p14:creationId xmlns:p14="http://schemas.microsoft.com/office/powerpoint/2010/main" val="1500036321"/>
+        <p14:creationId xmlns:p14="http://schemas.microsoft.com/office/powerpoint/2010/main" val="1016916543"/>
       </p:ext>
     </p:extLst>
   </p:cSld>
@@ -6818,7 +6818,7 @@
           <p:cNvPr id="16" name="">
             <a:extLst xmlns:a="http://schemas.openxmlformats.org/drawingml/2006/main">
               <a:ext uri="{FF2B5EF4-FFF2-40B4-BE49-F238E27FC236}">
-                <a16:creationId xmlns:a16="http://schemas.microsoft.com/office/drawing/2014/main" id="{1E91BC99-E8EC-432E-A980-E643A422FE0F}"/>
+                <a16:creationId xmlns:a16="http://schemas.microsoft.com/office/drawing/2014/main" id="{35EABA5E-9D7F-4A40-BA4E-878B3E1F53DC}"/>
               </a:ext>
             </a:extLst>
           </p:cNvPr>
@@ -6850,7 +6850,7 @@
           <p:cNvPr id="2" name="">
             <a:extLst xmlns:a="http://schemas.openxmlformats.org/drawingml/2006/main">
               <a:ext uri="{FF2B5EF4-FFF2-40B4-BE49-F238E27FC236}">
-                <a16:creationId xmlns:a16="http://schemas.microsoft.com/office/drawing/2014/main" id="{6D33DBF7-D52F-48E4-A829-EC81D4B44B91}"/>
+                <a16:creationId xmlns:a16="http://schemas.microsoft.com/office/drawing/2014/main" id="{D63B65D1-9EB2-4B0F-8C34-091A4425CBDF}"/>
               </a:ext>
             </a:extLst>
           </p:cNvPr>
@@ -6907,7 +6907,7 @@
           <p:cNvPr id="3" name="">
             <a:extLst xmlns:a="http://schemas.openxmlformats.org/drawingml/2006/main">
               <a:ext uri="{FF2B5EF4-FFF2-40B4-BE49-F238E27FC236}">
-                <a16:creationId xmlns:a16="http://schemas.microsoft.com/office/drawing/2014/main" id="{5ABBEC00-D64F-45A9-9C63-EF399918B010}"/>
+                <a16:creationId xmlns:a16="http://schemas.microsoft.com/office/drawing/2014/main" id="{47F17457-5B97-4244-9887-DB05A3FDA4AC}"/>
               </a:ext>
             </a:extLst>
           </p:cNvPr>
@@ -6939,7 +6939,7 @@
           <p:cNvPr id="4" name="">
             <a:extLst xmlns:a="http://schemas.openxmlformats.org/drawingml/2006/main">
               <a:ext uri="{FF2B5EF4-FFF2-40B4-BE49-F238E27FC236}">
-                <a16:creationId xmlns:a16="http://schemas.microsoft.com/office/drawing/2014/main" id="{E7729AFA-A068-4D5C-9246-3ADF96B349B2}"/>
+                <a16:creationId xmlns:a16="http://schemas.microsoft.com/office/drawing/2014/main" id="{FEB32C89-38B6-4BBC-8016-CC546D183EBB}"/>
               </a:ext>
             </a:extLst>
           </p:cNvPr>
@@ -6996,7 +6996,7 @@
           <p:cNvPr id="5" name="">
             <a:extLst xmlns:a="http://schemas.openxmlformats.org/drawingml/2006/main">
               <a:ext uri="{FF2B5EF4-FFF2-40B4-BE49-F238E27FC236}">
-                <a16:creationId xmlns:a16="http://schemas.microsoft.com/office/drawing/2014/main" id="{7A8724EC-5E86-4192-8C7E-D5785BFB4D57}"/>
+                <a16:creationId xmlns:a16="http://schemas.microsoft.com/office/drawing/2014/main" id="{D9F2D1CB-2ADA-42C8-A973-8A93B8719E77}"/>
               </a:ext>
             </a:extLst>
           </p:cNvPr>
@@ -7053,7 +7053,7 @@
           <p:cNvPr id="6" name="">
             <a:extLst xmlns:a="http://schemas.openxmlformats.org/drawingml/2006/main">
               <a:ext uri="{FF2B5EF4-FFF2-40B4-BE49-F238E27FC236}">
-                <a16:creationId xmlns:a16="http://schemas.microsoft.com/office/drawing/2014/main" id="{0A9CABCB-6800-431D-86CB-DBE3C711B36A}"/>
+                <a16:creationId xmlns:a16="http://schemas.microsoft.com/office/drawing/2014/main" id="{65A9B827-6324-4BCA-8C41-434C8D9072B6}"/>
               </a:ext>
             </a:extLst>
           </p:cNvPr>
@@ -7110,7 +7110,7 @@
           <p:cNvPr id="7" name="">
             <a:extLst xmlns:a="http://schemas.openxmlformats.org/drawingml/2006/main">
               <a:ext uri="{FF2B5EF4-FFF2-40B4-BE49-F238E27FC236}">
-                <a16:creationId xmlns:a16="http://schemas.microsoft.com/office/drawing/2014/main" id="{BB520E47-2646-4ADE-92B2-6CCCD8F68221}"/>
+                <a16:creationId xmlns:a16="http://schemas.microsoft.com/office/drawing/2014/main" id="{72FD5DD3-DBF4-4DFF-8744-39C012427D19}"/>
               </a:ext>
             </a:extLst>
           </p:cNvPr>
@@ -7142,7 +7142,7 @@
           <p:cNvPr id="8" name="">
             <a:extLst xmlns:a="http://schemas.openxmlformats.org/drawingml/2006/main">
               <a:ext uri="{FF2B5EF4-FFF2-40B4-BE49-F238E27FC236}">
-                <a16:creationId xmlns:a16="http://schemas.microsoft.com/office/drawing/2014/main" id="{97B537AB-8BEF-49B9-B896-C6535CEEAB35}"/>
+                <a16:creationId xmlns:a16="http://schemas.microsoft.com/office/drawing/2014/main" id="{EA9AD954-D091-4232-A458-228A4F3A4A03}"/>
               </a:ext>
             </a:extLst>
           </p:cNvPr>
@@ -7199,7 +7199,7 @@
           <p:cNvPr id="9" name="">
             <a:extLst xmlns:a="http://schemas.openxmlformats.org/drawingml/2006/main">
               <a:ext uri="{FF2B5EF4-FFF2-40B4-BE49-F238E27FC236}">
-                <a16:creationId xmlns:a16="http://schemas.microsoft.com/office/drawing/2014/main" id="{2BCC59A2-F847-4419-BB4C-77A6B3F7F8CD}"/>
+                <a16:creationId xmlns:a16="http://schemas.microsoft.com/office/drawing/2014/main" id="{BA132151-BA40-401C-B213-C2452C3824B1}"/>
               </a:ext>
             </a:extLst>
           </p:cNvPr>
@@ -7256,7 +7256,7 @@
           <p:cNvPr id="10" name="">
             <a:extLst xmlns:a="http://schemas.openxmlformats.org/drawingml/2006/main">
               <a:ext uri="{FF2B5EF4-FFF2-40B4-BE49-F238E27FC236}">
-                <a16:creationId xmlns:a16="http://schemas.microsoft.com/office/drawing/2014/main" id="{73E2AC05-C6CE-48F7-AA09-3F059294DB69}"/>
+                <a16:creationId xmlns:a16="http://schemas.microsoft.com/office/drawing/2014/main" id="{693642FE-FA5A-444A-BE03-7596173F5340}"/>
               </a:ext>
             </a:extLst>
           </p:cNvPr>
@@ -7313,7 +7313,7 @@
           <p:cNvPr id="11" name="">
             <a:extLst xmlns:a="http://schemas.openxmlformats.org/drawingml/2006/main">
               <a:ext uri="{FF2B5EF4-FFF2-40B4-BE49-F238E27FC236}">
-                <a16:creationId xmlns:a16="http://schemas.microsoft.com/office/drawing/2014/main" id="{CB0FB810-0D0B-4AC5-A296-977D6639EB1D}"/>
+                <a16:creationId xmlns:a16="http://schemas.microsoft.com/office/drawing/2014/main" id="{E173B8DE-3532-414A-B258-E3052ECBBAC6}"/>
               </a:ext>
             </a:extLst>
           </p:cNvPr>
@@ -7345,7 +7345,7 @@
           <p:cNvPr id="12" name="">
             <a:extLst xmlns:a="http://schemas.openxmlformats.org/drawingml/2006/main">
               <a:ext uri="{FF2B5EF4-FFF2-40B4-BE49-F238E27FC236}">
-                <a16:creationId xmlns:a16="http://schemas.microsoft.com/office/drawing/2014/main" id="{5F15F359-408B-45C7-B2C4-D70771727108}"/>
+                <a16:creationId xmlns:a16="http://schemas.microsoft.com/office/drawing/2014/main" id="{BCE6B0E3-E0CC-4981-ADE9-050688A6161B}"/>
               </a:ext>
             </a:extLst>
           </p:cNvPr>
@@ -7402,7 +7402,7 @@
           <p:cNvPr id="13" name="">
             <a:extLst xmlns:a="http://schemas.openxmlformats.org/drawingml/2006/main">
               <a:ext uri="{FF2B5EF4-FFF2-40B4-BE49-F238E27FC236}">
-                <a16:creationId xmlns:a16="http://schemas.microsoft.com/office/drawing/2014/main" id="{ECC60248-6817-49C4-B7DA-C4112759DB96}"/>
+                <a16:creationId xmlns:a16="http://schemas.microsoft.com/office/drawing/2014/main" id="{6F2877C4-839F-45FA-9C81-E52E569EEBEE}"/>
               </a:ext>
             </a:extLst>
           </p:cNvPr>
@@ -7459,7 +7459,7 @@
           <p:cNvPr id="14" name="">
             <a:extLst xmlns:a="http://schemas.openxmlformats.org/drawingml/2006/main">
               <a:ext uri="{FF2B5EF4-FFF2-40B4-BE49-F238E27FC236}">
-                <a16:creationId xmlns:a16="http://schemas.microsoft.com/office/drawing/2014/main" id="{B48C0DE1-5133-4C3B-9561-7CAC1DDD1125}"/>
+                <a16:creationId xmlns:a16="http://schemas.microsoft.com/office/drawing/2014/main" id="{670108F7-1DA1-41B2-8216-AD0A16739BAF}"/>
               </a:ext>
             </a:extLst>
           </p:cNvPr>
@@ -7516,7 +7516,7 @@
           <p:cNvPr id="15" name="">
             <a:extLst xmlns:a="http://schemas.openxmlformats.org/drawingml/2006/main">
               <a:ext uri="{FF2B5EF4-FFF2-40B4-BE49-F238E27FC236}">
-                <a16:creationId xmlns:a16="http://schemas.microsoft.com/office/drawing/2014/main" id="{4DA9BD04-7608-4383-9825-3481F90279A1}"/>
+                <a16:creationId xmlns:a16="http://schemas.microsoft.com/office/drawing/2014/main" id="{61EC04CF-C820-49BE-93D6-F7114961F6AA}"/>
               </a:ext>
             </a:extLst>
           </p:cNvPr>
@@ -7571,7 +7571,7 @@
     </p:spTree>
     <p:extLst>
       <p:ext uri="{BB962C8B-B14F-4D97-AF65-F5344CB8AC3E}">
-        <p14:creationId xmlns:p14="http://schemas.microsoft.com/office/powerpoint/2010/main" val="1377256814"/>
+        <p14:creationId xmlns:p14="http://schemas.microsoft.com/office/powerpoint/2010/main" val="1406176562"/>
       </p:ext>
     </p:extLst>
   </p:cSld>
@@ -7769,10 +7769,10 @@
       </p:grpSpPr>
       <p:sp>
         <p:nvSpPr>
-          <p:cNvPr id="23" name="">
-            <a:extLst xmlns:a="http://schemas.openxmlformats.org/drawingml/2006/main">
-              <a:ext uri="{FF2B5EF4-FFF2-40B4-BE49-F238E27FC236}">
-                <a16:creationId xmlns:a16="http://schemas.microsoft.com/office/drawing/2014/main" id="{DDA7B22E-CF5B-4209-B4F0-E2554A835EC7}"/>
+          <p:cNvPr id="26" name="">
+            <a:extLst xmlns:a="http://schemas.openxmlformats.org/drawingml/2006/main">
+              <a:ext uri="{FF2B5EF4-FFF2-40B4-BE49-F238E27FC236}">
+                <a16:creationId xmlns:a16="http://schemas.microsoft.com/office/drawing/2014/main" id="{08419A06-0CBF-4B15-B6D1-78848FB80D49}"/>
               </a:ext>
             </a:extLst>
           </p:cNvPr>
@@ -7804,7 +7804,7 @@
           <p:cNvPr id="2" name="">
             <a:extLst xmlns:a="http://schemas.openxmlformats.org/drawingml/2006/main">
               <a:ext uri="{FF2B5EF4-FFF2-40B4-BE49-F238E27FC236}">
-                <a16:creationId xmlns:a16="http://schemas.microsoft.com/office/drawing/2014/main" id="{9C2E3E9B-DBA1-4B14-843C-0BE0B91BC8F1}"/>
+                <a16:creationId xmlns:a16="http://schemas.microsoft.com/office/drawing/2014/main" id="{418585E8-A467-4102-932D-60FBCC1479F9}"/>
               </a:ext>
             </a:extLst>
           </p:cNvPr>
@@ -7861,7 +7861,7 @@
           <p:cNvPr id="3" name="">
             <a:extLst xmlns:a="http://schemas.openxmlformats.org/drawingml/2006/main">
               <a:ext uri="{FF2B5EF4-FFF2-40B4-BE49-F238E27FC236}">
-                <a16:creationId xmlns:a16="http://schemas.microsoft.com/office/drawing/2014/main" id="{E1BEA836-0123-480C-9A7B-35CA21C05F73}"/>
+                <a16:creationId xmlns:a16="http://schemas.microsoft.com/office/drawing/2014/main" id="{E0155112-31A0-44ED-9B98-C33F39AE42C3}"/>
               </a:ext>
             </a:extLst>
           </p:cNvPr>
@@ -7893,7 +7893,7 @@
           <p:cNvPr id="4" name="">
             <a:extLst xmlns:a="http://schemas.openxmlformats.org/drawingml/2006/main">
               <a:ext uri="{FF2B5EF4-FFF2-40B4-BE49-F238E27FC236}">
-                <a16:creationId xmlns:a16="http://schemas.microsoft.com/office/drawing/2014/main" id="{C3545E06-715A-4F7A-BA35-E6F5DF058812}"/>
+                <a16:creationId xmlns:a16="http://schemas.microsoft.com/office/drawing/2014/main" id="{A2DCE3D2-CE55-47F1-B91F-3B27EF5367D9}"/>
               </a:ext>
             </a:extLst>
           </p:cNvPr>
@@ -7950,7 +7950,7 @@
           <p:cNvPr id="5" name="">
             <a:extLst xmlns:a="http://schemas.openxmlformats.org/drawingml/2006/main">
               <a:ext uri="{FF2B5EF4-FFF2-40B4-BE49-F238E27FC236}">
-                <a16:creationId xmlns:a16="http://schemas.microsoft.com/office/drawing/2014/main" id="{D73C44A4-D9B8-4636-A625-46513BB9CC72}"/>
+                <a16:creationId xmlns:a16="http://schemas.microsoft.com/office/drawing/2014/main" id="{70971F4E-66F0-4B44-9D22-AB45873878B5}"/>
               </a:ext>
             </a:extLst>
           </p:cNvPr>
@@ -8007,7 +8007,7 @@
           <p:cNvPr id="6" name="">
             <a:extLst xmlns:a="http://schemas.openxmlformats.org/drawingml/2006/main">
               <a:ext uri="{FF2B5EF4-FFF2-40B4-BE49-F238E27FC236}">
-                <a16:creationId xmlns:a16="http://schemas.microsoft.com/office/drawing/2014/main" id="{3E015177-CFF3-435B-879A-54AAECCD71F3}"/>
+                <a16:creationId xmlns:a16="http://schemas.microsoft.com/office/drawing/2014/main" id="{130FC1AE-29F2-41CA-9562-36DF65A0CAB3}"/>
               </a:ext>
             </a:extLst>
           </p:cNvPr>
@@ -8064,7 +8064,7 @@
           <p:cNvPr id="7" name="">
             <a:extLst xmlns:a="http://schemas.openxmlformats.org/drawingml/2006/main">
               <a:ext uri="{FF2B5EF4-FFF2-40B4-BE49-F238E27FC236}">
-                <a16:creationId xmlns:a16="http://schemas.microsoft.com/office/drawing/2014/main" id="{B6374147-35B4-4F62-9775-0124FB234C01}"/>
+                <a16:creationId xmlns:a16="http://schemas.microsoft.com/office/drawing/2014/main" id="{BC731A48-6959-49F9-947A-F7B59F41D4A4}"/>
               </a:ext>
             </a:extLst>
           </p:cNvPr>
@@ -8096,7 +8096,7 @@
           <p:cNvPr id="8" name="">
             <a:extLst xmlns:a="http://schemas.openxmlformats.org/drawingml/2006/main">
               <a:ext uri="{FF2B5EF4-FFF2-40B4-BE49-F238E27FC236}">
-                <a16:creationId xmlns:a16="http://schemas.microsoft.com/office/drawing/2014/main" id="{9B400883-F3FB-49E1-A5C7-37E76130F4E7}"/>
+                <a16:creationId xmlns:a16="http://schemas.microsoft.com/office/drawing/2014/main" id="{31AD1911-9073-4628-8D7C-FA5606FF51E3}"/>
               </a:ext>
             </a:extLst>
           </p:cNvPr>
@@ -8153,7 +8153,7 @@
           <p:cNvPr id="9" name="">
             <a:extLst xmlns:a="http://schemas.openxmlformats.org/drawingml/2006/main">
               <a:ext uri="{FF2B5EF4-FFF2-40B4-BE49-F238E27FC236}">
-                <a16:creationId xmlns:a16="http://schemas.microsoft.com/office/drawing/2014/main" id="{DE495A2D-4767-4BAA-B4D4-E3922B9AE8A7}"/>
+                <a16:creationId xmlns:a16="http://schemas.microsoft.com/office/drawing/2014/main" id="{665BACF5-B6FE-4980-8A83-AC6973741CEA}"/>
               </a:ext>
             </a:extLst>
           </p:cNvPr>
@@ -8210,19 +8210,19 @@
           <p:cNvPr id="10" name="">
             <a:extLst xmlns:a="http://schemas.openxmlformats.org/drawingml/2006/main">
               <a:ext uri="{FF2B5EF4-FFF2-40B4-BE49-F238E27FC236}">
-                <a16:creationId xmlns:a16="http://schemas.microsoft.com/office/drawing/2014/main" id="{D6A2912B-A330-4A97-83C3-331E910E65A3}"/>
-              </a:ext>
-            </a:extLst>
-          </p:cNvPr>
-          <p:cNvSpPr>
-            <a:spLocks xmlns:a="http://schemas.openxmlformats.org/drawingml/2006/main" noGrp="1"/>
-          </p:cNvSpPr>
-          <p:nvPr/>
-        </p:nvSpPr>
-        <p:spPr>
-          <a:xfrm xmlns:a="http://schemas.openxmlformats.org/drawingml/2006/main">
-            <a:off x="914400" y="1257300"/>
-            <a:ext cx="10363200" cy="781050"/>
+                <a16:creationId xmlns:a16="http://schemas.microsoft.com/office/drawing/2014/main" id="{AA71B76C-3AD5-4428-B4B8-CFFCB3233F78}"/>
+              </a:ext>
+            </a:extLst>
+          </p:cNvPr>
+          <p:cNvSpPr>
+            <a:spLocks xmlns:a="http://schemas.openxmlformats.org/drawingml/2006/main" noGrp="1"/>
+          </p:cNvSpPr>
+          <p:nvPr/>
+        </p:nvSpPr>
+        <p:spPr>
+          <a:xfrm xmlns:a="http://schemas.openxmlformats.org/drawingml/2006/main">
+            <a:off x="857250" y="1219200"/>
+            <a:ext cx="10477500" cy="742950"/>
           </a:xfrm>
           <a:prstGeom xmlns:a="http://schemas.openxmlformats.org/drawingml/2006/main" prst="rect">
             <a:avLst/>
@@ -8239,7 +8239,7 @@
           <a:lstStyle xmlns:a="http://schemas.openxmlformats.org/drawingml/2006/main"/>
           <a:p xmlns:a="http://schemas.openxmlformats.org/drawingml/2006/main">
             <a:pPr algn="ctr">
-              <a:defRPr sz="2175" b="1">
+              <a:defRPr sz="2100" b="1">
                 <a:solidFill>
                   <a:srgbClr val="17253A"/>
                 </a:solidFill>
@@ -8249,7 +8249,7 @@
               </a:defRPr>
             </a:pPr>
             <a:r>
-              <a:rPr sz="2175" b="1">
+              <a:rPr sz="2100" b="1">
                 <a:solidFill>
                   <a:srgbClr val="17253A"/>
                 </a:solidFill>
@@ -8267,28 +8267,30 @@
           <p:cNvPr id="11" name="">
             <a:extLst xmlns:a="http://schemas.openxmlformats.org/drawingml/2006/main">
               <a:ext uri="{FF2B5EF4-FFF2-40B4-BE49-F238E27FC236}">
-                <a16:creationId xmlns:a16="http://schemas.microsoft.com/office/drawing/2014/main" id="{0819540A-A1AA-4D01-9017-AA7C87295B91}"/>
-              </a:ext>
-            </a:extLst>
-          </p:cNvPr>
-          <p:cNvSpPr>
-            <a:spLocks xmlns:a="http://schemas.openxmlformats.org/drawingml/2006/main" noGrp="1"/>
-          </p:cNvSpPr>
-          <p:nvPr/>
-        </p:nvSpPr>
-        <p:spPr>
-          <a:xfrm xmlns:a="http://schemas.openxmlformats.org/drawingml/2006/main">
-            <a:off x="1000125" y="2247900"/>
-            <a:ext cx="476250" cy="476250"/>
-          </a:xfrm>
-          <a:prstGeom xmlns:a="http://schemas.openxmlformats.org/drawingml/2006/main" prst="ellipse">
+                <a16:creationId xmlns:a16="http://schemas.microsoft.com/office/drawing/2014/main" id="{AD2F4469-ADC1-450F-8C38-A6C8EC657603}"/>
+              </a:ext>
+            </a:extLst>
+          </p:cNvPr>
+          <p:cNvSpPr>
+            <a:spLocks xmlns:a="http://schemas.openxmlformats.org/drawingml/2006/main" noGrp="1"/>
+          </p:cNvSpPr>
+          <p:nvPr/>
+        </p:nvSpPr>
+        <p:spPr>
+          <a:xfrm xmlns:a="http://schemas.openxmlformats.org/drawingml/2006/main">
+            <a:off x="971550" y="2124075"/>
+            <a:ext cx="38100" cy="3524250"/>
+          </a:xfrm>
+          <a:prstGeom xmlns:a="http://schemas.openxmlformats.org/drawingml/2006/main" prst="rect">
             <a:avLst/>
           </a:prstGeom>
           <a:solidFill xmlns:a="http://schemas.openxmlformats.org/drawingml/2006/main">
-            <a:srgbClr val="18324A"/>
+            <a:srgbClr val="2C6E73"/>
           </a:solidFill>
           <a:ln xmlns:a="http://schemas.openxmlformats.org/drawingml/2006/main" w="0">
-            <a:noFill/>
+            <a:solidFill>
+              <a:srgbClr val="2C6E73"/>
+            </a:solidFill>
           </a:ln>
         </p:spPr>
       </p:sp>
@@ -8297,19 +8299,19 @@
           <p:cNvPr id="12" name="">
             <a:extLst xmlns:a="http://schemas.openxmlformats.org/drawingml/2006/main">
               <a:ext uri="{FF2B5EF4-FFF2-40B4-BE49-F238E27FC236}">
-                <a16:creationId xmlns:a16="http://schemas.microsoft.com/office/drawing/2014/main" id="{B326DD92-2E25-4029-8106-C0CFD856CBD6}"/>
-              </a:ext>
-            </a:extLst>
-          </p:cNvPr>
-          <p:cNvSpPr>
-            <a:spLocks xmlns:a="http://schemas.openxmlformats.org/drawingml/2006/main" noGrp="1"/>
-          </p:cNvSpPr>
-          <p:nvPr/>
-        </p:nvSpPr>
-        <p:spPr>
-          <a:xfrm xmlns:a="http://schemas.openxmlformats.org/drawingml/2006/main">
-            <a:off x="1000125" y="2276475"/>
-            <a:ext cx="476250" cy="419100"/>
+                <a16:creationId xmlns:a16="http://schemas.microsoft.com/office/drawing/2014/main" id="{10F3892E-346B-4BB6-A1F9-491FEF57879A}"/>
+              </a:ext>
+            </a:extLst>
+          </p:cNvPr>
+          <p:cNvSpPr>
+            <a:spLocks xmlns:a="http://schemas.openxmlformats.org/drawingml/2006/main" noGrp="1"/>
+          </p:cNvSpPr>
+          <p:nvPr/>
+        </p:nvSpPr>
+        <p:spPr>
+          <a:xfrm xmlns:a="http://schemas.openxmlformats.org/drawingml/2006/main">
+            <a:off x="1162050" y="2200275"/>
+            <a:ext cx="400050" cy="400050"/>
           </a:xfrm>
           <a:prstGeom xmlns:a="http://schemas.openxmlformats.org/drawingml/2006/main" prst="rect">
             <a:avLst/>
@@ -8326,9 +8328,9 @@
           <a:lstStyle xmlns:a="http://schemas.openxmlformats.org/drawingml/2006/main"/>
           <a:p xmlns:a="http://schemas.openxmlformats.org/drawingml/2006/main">
             <a:pPr algn="ctr">
-              <a:defRPr sz="1350" b="1">
-                <a:solidFill>
-                  <a:srgbClr val="FFFFFF"/>
+              <a:defRPr sz="1125" b="1">
+                <a:solidFill>
+                  <a:srgbClr val="2C6E73"/>
                 </a:solidFill>
                 <a:latin typeface="Arial"/>
                 <a:ea typeface="Arial"/>
@@ -8336,9 +8338,9 @@
               </a:defRPr>
             </a:pPr>
             <a:r>
-              <a:rPr sz="1350" b="1">
-                <a:solidFill>
-                  <a:srgbClr val="FFFFFF"/>
+              <a:rPr sz="1125" b="1">
+                <a:solidFill>
+                  <a:srgbClr val="2C6E73"/>
                 </a:solidFill>
                 <a:latin typeface="Arial"/>
                 <a:ea typeface="Arial"/>
@@ -8354,19 +8356,19 @@
           <p:cNvPr id="13" name="">
             <a:extLst xmlns:a="http://schemas.openxmlformats.org/drawingml/2006/main">
               <a:ext uri="{FF2B5EF4-FFF2-40B4-BE49-F238E27FC236}">
-                <a16:creationId xmlns:a16="http://schemas.microsoft.com/office/drawing/2014/main" id="{3BA6466F-6A14-4A5D-8CB2-84F669B470CB}"/>
-              </a:ext>
-            </a:extLst>
-          </p:cNvPr>
-          <p:cNvSpPr>
-            <a:spLocks xmlns:a="http://schemas.openxmlformats.org/drawingml/2006/main" noGrp="1"/>
-          </p:cNvSpPr>
-          <p:nvPr/>
-        </p:nvSpPr>
-        <p:spPr>
-          <a:xfrm xmlns:a="http://schemas.openxmlformats.org/drawingml/2006/main">
-            <a:off x="1714500" y="2181225"/>
-            <a:ext cx="9429750" cy="609600"/>
+                <a16:creationId xmlns:a16="http://schemas.microsoft.com/office/drawing/2014/main" id="{178416D4-0F1E-4414-BDD2-9A0C48A62795}"/>
+              </a:ext>
+            </a:extLst>
+          </p:cNvPr>
+          <p:cNvSpPr>
+            <a:spLocks xmlns:a="http://schemas.openxmlformats.org/drawingml/2006/main" noGrp="1"/>
+          </p:cNvSpPr>
+          <p:nvPr/>
+        </p:nvSpPr>
+        <p:spPr>
+          <a:xfrm xmlns:a="http://schemas.openxmlformats.org/drawingml/2006/main">
+            <a:off x="1714500" y="2114550"/>
+            <a:ext cx="9525000" cy="638175"/>
           </a:xfrm>
           <a:prstGeom xmlns:a="http://schemas.openxmlformats.org/drawingml/2006/main" prst="rect">
             <a:avLst/>
@@ -8383,7 +8385,7 @@
           <a:lstStyle xmlns:a="http://schemas.openxmlformats.org/drawingml/2006/main"/>
           <a:p xmlns:a="http://schemas.openxmlformats.org/drawingml/2006/main">
             <a:pPr algn="l">
-              <a:defRPr sz="1500" b="0">
+              <a:defRPr sz="1575" b="0">
                 <a:solidFill>
                   <a:srgbClr val="17253A"/>
                 </a:solidFill>
@@ -8393,7 +8395,7 @@
               </a:defRPr>
             </a:pPr>
             <a:r>
-              <a:rPr sz="1500" b="0">
+              <a:rPr sz="1575" b="0">
                 <a:solidFill>
                   <a:srgbClr val="17253A"/>
                 </a:solidFill>
@@ -8401,7 +8403,7 @@
                 <a:ea typeface="Arial"/>
                 <a:cs typeface="Arial"/>
               </a:rPr>
-              <a:t>Identify the structure: Retrieve the relevant fact, representation or formula.</a:t>
+              <a:t>2 1/4 ÷ 3</a:t>
             </a:r>
           </a:p>
         </p:txBody>
@@ -8411,28 +8413,30 @@
           <p:cNvPr id="14" name="">
             <a:extLst xmlns:a="http://schemas.openxmlformats.org/drawingml/2006/main">
               <a:ext uri="{FF2B5EF4-FFF2-40B4-BE49-F238E27FC236}">
-                <a16:creationId xmlns:a16="http://schemas.microsoft.com/office/drawing/2014/main" id="{18D53DA2-EBDD-4828-9ED5-3D23404D99AA}"/>
-              </a:ext>
-            </a:extLst>
-          </p:cNvPr>
-          <p:cNvSpPr>
-            <a:spLocks xmlns:a="http://schemas.openxmlformats.org/drawingml/2006/main" noGrp="1"/>
-          </p:cNvSpPr>
-          <p:nvPr/>
-        </p:nvSpPr>
-        <p:spPr>
-          <a:xfrm xmlns:a="http://schemas.openxmlformats.org/drawingml/2006/main">
-            <a:off x="1000125" y="2990850"/>
-            <a:ext cx="476250" cy="476250"/>
-          </a:xfrm>
-          <a:prstGeom xmlns:a="http://schemas.openxmlformats.org/drawingml/2006/main" prst="ellipse">
+                <a16:creationId xmlns:a16="http://schemas.microsoft.com/office/drawing/2014/main" id="{0DCD7FEF-6AD4-496B-BBE5-CC68F36232BE}"/>
+              </a:ext>
+            </a:extLst>
+          </p:cNvPr>
+          <p:cNvSpPr>
+            <a:spLocks xmlns:a="http://schemas.openxmlformats.org/drawingml/2006/main" noGrp="1"/>
+          </p:cNvSpPr>
+          <p:nvPr/>
+        </p:nvSpPr>
+        <p:spPr>
+          <a:xfrm xmlns:a="http://schemas.openxmlformats.org/drawingml/2006/main">
+            <a:off x="1714500" y="2771775"/>
+            <a:ext cx="9334500" cy="9525"/>
+          </a:xfrm>
+          <a:prstGeom xmlns:a="http://schemas.openxmlformats.org/drawingml/2006/main" prst="rect">
             <a:avLst/>
           </a:prstGeom>
           <a:solidFill xmlns:a="http://schemas.openxmlformats.org/drawingml/2006/main">
-            <a:srgbClr val="2C6E73"/>
+            <a:srgbClr val="D9E0E6"/>
           </a:solidFill>
           <a:ln xmlns:a="http://schemas.openxmlformats.org/drawingml/2006/main" w="0">
-            <a:noFill/>
+            <a:solidFill>
+              <a:srgbClr val="D9E0E6"/>
+            </a:solidFill>
           </a:ln>
         </p:spPr>
       </p:sp>
@@ -8441,19 +8445,19 @@
           <p:cNvPr id="15" name="">
             <a:extLst xmlns:a="http://schemas.openxmlformats.org/drawingml/2006/main">
               <a:ext uri="{FF2B5EF4-FFF2-40B4-BE49-F238E27FC236}">
-                <a16:creationId xmlns:a16="http://schemas.microsoft.com/office/drawing/2014/main" id="{5B02A975-6593-4ADA-871C-FDA1DB3E4C43}"/>
-              </a:ext>
-            </a:extLst>
-          </p:cNvPr>
-          <p:cNvSpPr>
-            <a:spLocks xmlns:a="http://schemas.openxmlformats.org/drawingml/2006/main" noGrp="1"/>
-          </p:cNvSpPr>
-          <p:nvPr/>
-        </p:nvSpPr>
-        <p:spPr>
-          <a:xfrm xmlns:a="http://schemas.openxmlformats.org/drawingml/2006/main">
-            <a:off x="1000125" y="3019425"/>
-            <a:ext cx="476250" cy="419100"/>
+                <a16:creationId xmlns:a16="http://schemas.microsoft.com/office/drawing/2014/main" id="{A92F94B6-893A-46D1-B5AC-6667761CDD4E}"/>
+              </a:ext>
+            </a:extLst>
+          </p:cNvPr>
+          <p:cNvSpPr>
+            <a:spLocks xmlns:a="http://schemas.openxmlformats.org/drawingml/2006/main" noGrp="1"/>
+          </p:cNvSpPr>
+          <p:nvPr/>
+        </p:nvSpPr>
+        <p:spPr>
+          <a:xfrm xmlns:a="http://schemas.openxmlformats.org/drawingml/2006/main">
+            <a:off x="1162050" y="2905125"/>
+            <a:ext cx="400050" cy="400050"/>
           </a:xfrm>
           <a:prstGeom xmlns:a="http://schemas.openxmlformats.org/drawingml/2006/main" prst="rect">
             <a:avLst/>
@@ -8470,9 +8474,9 @@
           <a:lstStyle xmlns:a="http://schemas.openxmlformats.org/drawingml/2006/main"/>
           <a:p xmlns:a="http://schemas.openxmlformats.org/drawingml/2006/main">
             <a:pPr algn="ctr">
-              <a:defRPr sz="1350" b="1">
-                <a:solidFill>
-                  <a:srgbClr val="FFFFFF"/>
+              <a:defRPr sz="1125" b="1">
+                <a:solidFill>
+                  <a:srgbClr val="2C6E73"/>
                 </a:solidFill>
                 <a:latin typeface="Arial"/>
                 <a:ea typeface="Arial"/>
@@ -8480,9 +8484,9 @@
               </a:defRPr>
             </a:pPr>
             <a:r>
-              <a:rPr sz="1350" b="1">
-                <a:solidFill>
-                  <a:srgbClr val="FFFFFF"/>
+              <a:rPr sz="1125" b="1">
+                <a:solidFill>
+                  <a:srgbClr val="2C6E73"/>
                 </a:solidFill>
                 <a:latin typeface="Arial"/>
                 <a:ea typeface="Arial"/>
@@ -8498,19 +8502,19 @@
           <p:cNvPr id="16" name="">
             <a:extLst xmlns:a="http://schemas.openxmlformats.org/drawingml/2006/main">
               <a:ext uri="{FF2B5EF4-FFF2-40B4-BE49-F238E27FC236}">
-                <a16:creationId xmlns:a16="http://schemas.microsoft.com/office/drawing/2014/main" id="{8D750099-FCDF-4B0B-A751-54453CEDB6B2}"/>
-              </a:ext>
-            </a:extLst>
-          </p:cNvPr>
-          <p:cNvSpPr>
-            <a:spLocks xmlns:a="http://schemas.openxmlformats.org/drawingml/2006/main" noGrp="1"/>
-          </p:cNvSpPr>
-          <p:nvPr/>
-        </p:nvSpPr>
-        <p:spPr>
-          <a:xfrm xmlns:a="http://schemas.openxmlformats.org/drawingml/2006/main">
-            <a:off x="1714500" y="2924175"/>
-            <a:ext cx="9429750" cy="609600"/>
+                <a16:creationId xmlns:a16="http://schemas.microsoft.com/office/drawing/2014/main" id="{FE1425B7-DAD2-4BED-8042-CCC2BE12AC45}"/>
+              </a:ext>
+            </a:extLst>
+          </p:cNvPr>
+          <p:cNvSpPr>
+            <a:spLocks xmlns:a="http://schemas.openxmlformats.org/drawingml/2006/main" noGrp="1"/>
+          </p:cNvSpPr>
+          <p:nvPr/>
+        </p:nvSpPr>
+        <p:spPr>
+          <a:xfrm xmlns:a="http://schemas.openxmlformats.org/drawingml/2006/main">
+            <a:off x="1714500" y="2819400"/>
+            <a:ext cx="9525000" cy="638175"/>
           </a:xfrm>
           <a:prstGeom xmlns:a="http://schemas.openxmlformats.org/drawingml/2006/main" prst="rect">
             <a:avLst/>
@@ -8527,7 +8531,7 @@
           <a:lstStyle xmlns:a="http://schemas.openxmlformats.org/drawingml/2006/main"/>
           <a:p xmlns:a="http://schemas.openxmlformats.org/drawingml/2006/main">
             <a:pPr algn="l">
-              <a:defRPr sz="1500" b="0">
+              <a:defRPr sz="1575" b="0">
                 <a:solidFill>
                   <a:srgbClr val="17253A"/>
                 </a:solidFill>
@@ -8537,7 +8541,7 @@
               </a:defRPr>
             </a:pPr>
             <a:r>
-              <a:rPr sz="1500" b="0">
+              <a:rPr sz="1575" b="0">
                 <a:solidFill>
                   <a:srgbClr val="17253A"/>
                 </a:solidFill>
@@ -8545,7 +8549,7 @@
                 <a:ea typeface="Arial"/>
                 <a:cs typeface="Arial"/>
               </a:rPr>
-              <a:t>Set up the method: Show a complete method and explain the mathematical decision.</a:t>
+              <a:t>2 1/4 = 9/4</a:t>
             </a:r>
           </a:p>
         </p:txBody>
@@ -8555,28 +8559,30 @@
           <p:cNvPr id="17" name="">
             <a:extLst xmlns:a="http://schemas.openxmlformats.org/drawingml/2006/main">
               <a:ext uri="{FF2B5EF4-FFF2-40B4-BE49-F238E27FC236}">
-                <a16:creationId xmlns:a16="http://schemas.microsoft.com/office/drawing/2014/main" id="{73C11587-6641-48F9-949B-066E43BB4676}"/>
-              </a:ext>
-            </a:extLst>
-          </p:cNvPr>
-          <p:cNvSpPr>
-            <a:spLocks xmlns:a="http://schemas.openxmlformats.org/drawingml/2006/main" noGrp="1"/>
-          </p:cNvSpPr>
-          <p:nvPr/>
-        </p:nvSpPr>
-        <p:spPr>
-          <a:xfrm xmlns:a="http://schemas.openxmlformats.org/drawingml/2006/main">
-            <a:off x="1000125" y="3733800"/>
-            <a:ext cx="476250" cy="476250"/>
-          </a:xfrm>
-          <a:prstGeom xmlns:a="http://schemas.openxmlformats.org/drawingml/2006/main" prst="ellipse">
+                <a16:creationId xmlns:a16="http://schemas.microsoft.com/office/drawing/2014/main" id="{5F3C45F9-171A-4808-A926-C1E9A7D2D452}"/>
+              </a:ext>
+            </a:extLst>
+          </p:cNvPr>
+          <p:cNvSpPr>
+            <a:spLocks xmlns:a="http://schemas.openxmlformats.org/drawingml/2006/main" noGrp="1"/>
+          </p:cNvSpPr>
+          <p:nvPr/>
+        </p:nvSpPr>
+        <p:spPr>
+          <a:xfrm xmlns:a="http://schemas.openxmlformats.org/drawingml/2006/main">
+            <a:off x="1714500" y="3476625"/>
+            <a:ext cx="9334500" cy="9525"/>
+          </a:xfrm>
+          <a:prstGeom xmlns:a="http://schemas.openxmlformats.org/drawingml/2006/main" prst="rect">
             <a:avLst/>
           </a:prstGeom>
           <a:solidFill xmlns:a="http://schemas.openxmlformats.org/drawingml/2006/main">
-            <a:srgbClr val="2C6E73"/>
+            <a:srgbClr val="D9E0E6"/>
           </a:solidFill>
           <a:ln xmlns:a="http://schemas.openxmlformats.org/drawingml/2006/main" w="0">
-            <a:noFill/>
+            <a:solidFill>
+              <a:srgbClr val="D9E0E6"/>
+            </a:solidFill>
           </a:ln>
         </p:spPr>
       </p:sp>
@@ -8585,19 +8591,19 @@
           <p:cNvPr id="18" name="">
             <a:extLst xmlns:a="http://schemas.openxmlformats.org/drawingml/2006/main">
               <a:ext uri="{FF2B5EF4-FFF2-40B4-BE49-F238E27FC236}">
-                <a16:creationId xmlns:a16="http://schemas.microsoft.com/office/drawing/2014/main" id="{5E4E04F6-5CB5-455E-A0E6-669D60485D07}"/>
-              </a:ext>
-            </a:extLst>
-          </p:cNvPr>
-          <p:cNvSpPr>
-            <a:spLocks xmlns:a="http://schemas.openxmlformats.org/drawingml/2006/main" noGrp="1"/>
-          </p:cNvSpPr>
-          <p:nvPr/>
-        </p:nvSpPr>
-        <p:spPr>
-          <a:xfrm xmlns:a="http://schemas.openxmlformats.org/drawingml/2006/main">
-            <a:off x="1000125" y="3762375"/>
-            <a:ext cx="476250" cy="419100"/>
+                <a16:creationId xmlns:a16="http://schemas.microsoft.com/office/drawing/2014/main" id="{2DA3A528-6DA5-4611-84B1-50CB76D23ED5}"/>
+              </a:ext>
+            </a:extLst>
+          </p:cNvPr>
+          <p:cNvSpPr>
+            <a:spLocks xmlns:a="http://schemas.openxmlformats.org/drawingml/2006/main" noGrp="1"/>
+          </p:cNvSpPr>
+          <p:nvPr/>
+        </p:nvSpPr>
+        <p:spPr>
+          <a:xfrm xmlns:a="http://schemas.openxmlformats.org/drawingml/2006/main">
+            <a:off x="1162050" y="3609975"/>
+            <a:ext cx="400050" cy="400050"/>
           </a:xfrm>
           <a:prstGeom xmlns:a="http://schemas.openxmlformats.org/drawingml/2006/main" prst="rect">
             <a:avLst/>
@@ -8614,9 +8620,9 @@
           <a:lstStyle xmlns:a="http://schemas.openxmlformats.org/drawingml/2006/main"/>
           <a:p xmlns:a="http://schemas.openxmlformats.org/drawingml/2006/main">
             <a:pPr algn="ctr">
-              <a:defRPr sz="1350" b="1">
-                <a:solidFill>
-                  <a:srgbClr val="FFFFFF"/>
+              <a:defRPr sz="1125" b="1">
+                <a:solidFill>
+                  <a:srgbClr val="2C6E73"/>
                 </a:solidFill>
                 <a:latin typeface="Arial"/>
                 <a:ea typeface="Arial"/>
@@ -8624,9 +8630,9 @@
               </a:defRPr>
             </a:pPr>
             <a:r>
-              <a:rPr sz="1350" b="1">
-                <a:solidFill>
-                  <a:srgbClr val="FFFFFF"/>
+              <a:rPr sz="1125" b="1">
+                <a:solidFill>
+                  <a:srgbClr val="2C6E73"/>
                 </a:solidFill>
                 <a:latin typeface="Arial"/>
                 <a:ea typeface="Arial"/>
@@ -8642,19 +8648,19 @@
           <p:cNvPr id="19" name="">
             <a:extLst xmlns:a="http://schemas.openxmlformats.org/drawingml/2006/main">
               <a:ext uri="{FF2B5EF4-FFF2-40B4-BE49-F238E27FC236}">
-                <a16:creationId xmlns:a16="http://schemas.microsoft.com/office/drawing/2014/main" id="{64969729-A62C-4C0D-A23B-00B941289150}"/>
-              </a:ext>
-            </a:extLst>
-          </p:cNvPr>
-          <p:cNvSpPr>
-            <a:spLocks xmlns:a="http://schemas.openxmlformats.org/drawingml/2006/main" noGrp="1"/>
-          </p:cNvSpPr>
-          <p:nvPr/>
-        </p:nvSpPr>
-        <p:spPr>
-          <a:xfrm xmlns:a="http://schemas.openxmlformats.org/drawingml/2006/main">
-            <a:off x="1714500" y="3667125"/>
-            <a:ext cx="9429750" cy="609600"/>
+                <a16:creationId xmlns:a16="http://schemas.microsoft.com/office/drawing/2014/main" id="{50B40C0D-9AF3-4460-A134-AD5D8502611A}"/>
+              </a:ext>
+            </a:extLst>
+          </p:cNvPr>
+          <p:cNvSpPr>
+            <a:spLocks xmlns:a="http://schemas.openxmlformats.org/drawingml/2006/main" noGrp="1"/>
+          </p:cNvSpPr>
+          <p:nvPr/>
+        </p:nvSpPr>
+        <p:spPr>
+          <a:xfrm xmlns:a="http://schemas.openxmlformats.org/drawingml/2006/main">
+            <a:off x="1714500" y="3524250"/>
+            <a:ext cx="9525000" cy="638175"/>
           </a:xfrm>
           <a:prstGeom xmlns:a="http://schemas.openxmlformats.org/drawingml/2006/main" prst="rect">
             <a:avLst/>
@@ -8671,7 +8677,7 @@
           <a:lstStyle xmlns:a="http://schemas.openxmlformats.org/drawingml/2006/main"/>
           <a:p xmlns:a="http://schemas.openxmlformats.org/drawingml/2006/main">
             <a:pPr algn="l">
-              <a:defRPr sz="1500" b="0">
+              <a:defRPr sz="1575" b="0">
                 <a:solidFill>
                   <a:srgbClr val="17253A"/>
                 </a:solidFill>
@@ -8681,7 +8687,7 @@
               </a:defRPr>
             </a:pPr>
             <a:r>
-              <a:rPr sz="1500" b="0">
+              <a:rPr sz="1575" b="0">
                 <a:solidFill>
                   <a:srgbClr val="17253A"/>
                 </a:solidFill>
@@ -8689,7 +8695,7 @@
                 <a:ea typeface="Arial"/>
                 <a:cs typeface="Arial"/>
               </a:rPr>
-              <a:t>Complete the calculation: 3/4 or 0.75.</a:t>
+              <a:t>9/4 × 1/3 = 9/12</a:t>
             </a:r>
           </a:p>
         </p:txBody>
@@ -8699,28 +8705,30 @@
           <p:cNvPr id="20" name="">
             <a:extLst xmlns:a="http://schemas.openxmlformats.org/drawingml/2006/main">
               <a:ext uri="{FF2B5EF4-FFF2-40B4-BE49-F238E27FC236}">
-                <a16:creationId xmlns:a16="http://schemas.microsoft.com/office/drawing/2014/main" id="{CBBDD345-2FC3-4221-92F5-F3C1B3A1AD06}"/>
-              </a:ext>
-            </a:extLst>
-          </p:cNvPr>
-          <p:cNvSpPr>
-            <a:spLocks xmlns:a="http://schemas.openxmlformats.org/drawingml/2006/main" noGrp="1"/>
-          </p:cNvSpPr>
-          <p:nvPr/>
-        </p:nvSpPr>
-        <p:spPr>
-          <a:xfrm xmlns:a="http://schemas.openxmlformats.org/drawingml/2006/main">
-            <a:off x="1000125" y="4476750"/>
-            <a:ext cx="476250" cy="476250"/>
-          </a:xfrm>
-          <a:prstGeom xmlns:a="http://schemas.openxmlformats.org/drawingml/2006/main" prst="ellipse">
+                <a16:creationId xmlns:a16="http://schemas.microsoft.com/office/drawing/2014/main" id="{FB2F257D-AB60-4917-B5A8-5E6882A753CE}"/>
+              </a:ext>
+            </a:extLst>
+          </p:cNvPr>
+          <p:cNvSpPr>
+            <a:spLocks xmlns:a="http://schemas.openxmlformats.org/drawingml/2006/main" noGrp="1"/>
+          </p:cNvSpPr>
+          <p:nvPr/>
+        </p:nvSpPr>
+        <p:spPr>
+          <a:xfrm xmlns:a="http://schemas.openxmlformats.org/drawingml/2006/main">
+            <a:off x="1714500" y="4181475"/>
+            <a:ext cx="9334500" cy="9525"/>
+          </a:xfrm>
+          <a:prstGeom xmlns:a="http://schemas.openxmlformats.org/drawingml/2006/main" prst="rect">
             <a:avLst/>
           </a:prstGeom>
           <a:solidFill xmlns:a="http://schemas.openxmlformats.org/drawingml/2006/main">
-            <a:srgbClr val="2C6E73"/>
+            <a:srgbClr val="D9E0E6"/>
           </a:solidFill>
           <a:ln xmlns:a="http://schemas.openxmlformats.org/drawingml/2006/main" w="0">
-            <a:noFill/>
+            <a:solidFill>
+              <a:srgbClr val="D9E0E6"/>
+            </a:solidFill>
           </a:ln>
         </p:spPr>
       </p:sp>
@@ -8729,19 +8737,19 @@
           <p:cNvPr id="21" name="">
             <a:extLst xmlns:a="http://schemas.openxmlformats.org/drawingml/2006/main">
               <a:ext uri="{FF2B5EF4-FFF2-40B4-BE49-F238E27FC236}">
-                <a16:creationId xmlns:a16="http://schemas.microsoft.com/office/drawing/2014/main" id="{9348B21A-2C06-449C-A551-13E2A1005D7B}"/>
-              </a:ext>
-            </a:extLst>
-          </p:cNvPr>
-          <p:cNvSpPr>
-            <a:spLocks xmlns:a="http://schemas.openxmlformats.org/drawingml/2006/main" noGrp="1"/>
-          </p:cNvSpPr>
-          <p:nvPr/>
-        </p:nvSpPr>
-        <p:spPr>
-          <a:xfrm xmlns:a="http://schemas.openxmlformats.org/drawingml/2006/main">
-            <a:off x="1000125" y="4505325"/>
-            <a:ext cx="476250" cy="419100"/>
+                <a16:creationId xmlns:a16="http://schemas.microsoft.com/office/drawing/2014/main" id="{C9C9BF2E-5F99-42C4-AE06-4B83CD8F7D3F}"/>
+              </a:ext>
+            </a:extLst>
+          </p:cNvPr>
+          <p:cNvSpPr>
+            <a:spLocks xmlns:a="http://schemas.openxmlformats.org/drawingml/2006/main" noGrp="1"/>
+          </p:cNvSpPr>
+          <p:nvPr/>
+        </p:nvSpPr>
+        <p:spPr>
+          <a:xfrm xmlns:a="http://schemas.openxmlformats.org/drawingml/2006/main">
+            <a:off x="1162050" y="4314825"/>
+            <a:ext cx="400050" cy="400050"/>
           </a:xfrm>
           <a:prstGeom xmlns:a="http://schemas.openxmlformats.org/drawingml/2006/main" prst="rect">
             <a:avLst/>
@@ -8758,9 +8766,9 @@
           <a:lstStyle xmlns:a="http://schemas.openxmlformats.org/drawingml/2006/main"/>
           <a:p xmlns:a="http://schemas.openxmlformats.org/drawingml/2006/main">
             <a:pPr algn="ctr">
-              <a:defRPr sz="1350" b="1">
-                <a:solidFill>
-                  <a:srgbClr val="FFFFFF"/>
+              <a:defRPr sz="1125" b="1">
+                <a:solidFill>
+                  <a:srgbClr val="2C6E73"/>
                 </a:solidFill>
                 <a:latin typeface="Arial"/>
                 <a:ea typeface="Arial"/>
@@ -8768,9 +8776,9 @@
               </a:defRPr>
             </a:pPr>
             <a:r>
-              <a:rPr sz="1350" b="1">
-                <a:solidFill>
-                  <a:srgbClr val="FFFFFF"/>
+              <a:rPr sz="1125" b="1">
+                <a:solidFill>
+                  <a:srgbClr val="2C6E73"/>
                 </a:solidFill>
                 <a:latin typeface="Arial"/>
                 <a:ea typeface="Arial"/>
@@ -8786,19 +8794,19 @@
           <p:cNvPr id="22" name="">
             <a:extLst xmlns:a="http://schemas.openxmlformats.org/drawingml/2006/main">
               <a:ext uri="{FF2B5EF4-FFF2-40B4-BE49-F238E27FC236}">
-                <a16:creationId xmlns:a16="http://schemas.microsoft.com/office/drawing/2014/main" id="{F61676E9-7553-4692-AC96-44EC6BFCB003}"/>
-              </a:ext>
-            </a:extLst>
-          </p:cNvPr>
-          <p:cNvSpPr>
-            <a:spLocks xmlns:a="http://schemas.openxmlformats.org/drawingml/2006/main" noGrp="1"/>
-          </p:cNvSpPr>
-          <p:nvPr/>
-        </p:nvSpPr>
-        <p:spPr>
-          <a:xfrm xmlns:a="http://schemas.openxmlformats.org/drawingml/2006/main">
-            <a:off x="1714500" y="4410075"/>
-            <a:ext cx="9429750" cy="609600"/>
+                <a16:creationId xmlns:a16="http://schemas.microsoft.com/office/drawing/2014/main" id="{34A1A245-C086-4D9A-9CF6-5273231F7EB5}"/>
+              </a:ext>
+            </a:extLst>
+          </p:cNvPr>
+          <p:cNvSpPr>
+            <a:spLocks xmlns:a="http://schemas.openxmlformats.org/drawingml/2006/main" noGrp="1"/>
+          </p:cNvSpPr>
+          <p:nvPr/>
+        </p:nvSpPr>
+        <p:spPr>
+          <a:xfrm xmlns:a="http://schemas.openxmlformats.org/drawingml/2006/main">
+            <a:off x="1714500" y="4229100"/>
+            <a:ext cx="9525000" cy="638175"/>
           </a:xfrm>
           <a:prstGeom xmlns:a="http://schemas.openxmlformats.org/drawingml/2006/main" prst="rect">
             <a:avLst/>
@@ -8815,9 +8823,9 @@
           <a:lstStyle xmlns:a="http://schemas.openxmlformats.org/drawingml/2006/main"/>
           <a:p xmlns:a="http://schemas.openxmlformats.org/drawingml/2006/main">
             <a:pPr algn="l">
-              <a:defRPr sz="1500" b="1">
-                <a:solidFill>
-                  <a:srgbClr val="2F785D"/>
+              <a:defRPr sz="1575" b="0">
+                <a:solidFill>
+                  <a:srgbClr val="17253A"/>
                 </a:solidFill>
                 <a:latin typeface="Arial"/>
                 <a:ea typeface="Arial"/>
@@ -8825,15 +8833,161 @@
               </a:defRPr>
             </a:pPr>
             <a:r>
-              <a:rPr sz="1500" b="1">
+              <a:rPr sz="1575" b="0">
+                <a:solidFill>
+                  <a:srgbClr val="17253A"/>
+                </a:solidFill>
+                <a:latin typeface="Arial"/>
+                <a:ea typeface="Arial"/>
+                <a:cs typeface="Arial"/>
+              </a:rPr>
+              <a:t>9/12 = 3/4</a:t>
+            </a:r>
+          </a:p>
+        </p:txBody>
+      </p:sp>
+      <p:sp>
+        <p:nvSpPr>
+          <p:cNvPr id="23" name="">
+            <a:extLst xmlns:a="http://schemas.openxmlformats.org/drawingml/2006/main">
+              <a:ext uri="{FF2B5EF4-FFF2-40B4-BE49-F238E27FC236}">
+                <a16:creationId xmlns:a16="http://schemas.microsoft.com/office/drawing/2014/main" id="{CC5D3936-63E2-45F7-9C2F-46A7719CF92A}"/>
+              </a:ext>
+            </a:extLst>
+          </p:cNvPr>
+          <p:cNvSpPr>
+            <a:spLocks xmlns:a="http://schemas.openxmlformats.org/drawingml/2006/main" noGrp="1"/>
+          </p:cNvSpPr>
+          <p:nvPr/>
+        </p:nvSpPr>
+        <p:spPr>
+          <a:xfrm xmlns:a="http://schemas.openxmlformats.org/drawingml/2006/main">
+            <a:off x="1714500" y="4886325"/>
+            <a:ext cx="9334500" cy="9525"/>
+          </a:xfrm>
+          <a:prstGeom xmlns:a="http://schemas.openxmlformats.org/drawingml/2006/main" prst="rect">
+            <a:avLst/>
+          </a:prstGeom>
+          <a:solidFill xmlns:a="http://schemas.openxmlformats.org/drawingml/2006/main">
+            <a:srgbClr val="D9E0E6"/>
+          </a:solidFill>
+          <a:ln xmlns:a="http://schemas.openxmlformats.org/drawingml/2006/main" w="0">
+            <a:solidFill>
+              <a:srgbClr val="D9E0E6"/>
+            </a:solidFill>
+          </a:ln>
+        </p:spPr>
+      </p:sp>
+      <p:sp>
+        <p:nvSpPr>
+          <p:cNvPr id="24" name="">
+            <a:extLst xmlns:a="http://schemas.openxmlformats.org/drawingml/2006/main">
+              <a:ext uri="{FF2B5EF4-FFF2-40B4-BE49-F238E27FC236}">
+                <a16:creationId xmlns:a16="http://schemas.microsoft.com/office/drawing/2014/main" id="{E07B10FA-004E-4933-AC51-20AD3ADBCE01}"/>
+              </a:ext>
+            </a:extLst>
+          </p:cNvPr>
+          <p:cNvSpPr>
+            <a:spLocks xmlns:a="http://schemas.openxmlformats.org/drawingml/2006/main" noGrp="1"/>
+          </p:cNvSpPr>
+          <p:nvPr/>
+        </p:nvSpPr>
+        <p:spPr>
+          <a:xfrm xmlns:a="http://schemas.openxmlformats.org/drawingml/2006/main">
+            <a:off x="1162050" y="5019675"/>
+            <a:ext cx="400050" cy="400050"/>
+          </a:xfrm>
+          <a:prstGeom xmlns:a="http://schemas.openxmlformats.org/drawingml/2006/main" prst="rect">
+            <a:avLst/>
+          </a:prstGeom>
+          <a:noFill xmlns:a="http://schemas.openxmlformats.org/drawingml/2006/main"/>
+          <a:ln xmlns:a="http://schemas.openxmlformats.org/drawingml/2006/main" w="0">
+            <a:noFill/>
+          </a:ln>
+        </p:spPr>
+        <p:txBody>
+          <a:bodyPr xmlns:a="http://schemas.openxmlformats.org/drawingml/2006/main" anchor="ctr">
+            <a:normAutofit fontScale="100000"/>
+          </a:bodyPr>
+          <a:lstStyle xmlns:a="http://schemas.openxmlformats.org/drawingml/2006/main"/>
+          <a:p xmlns:a="http://schemas.openxmlformats.org/drawingml/2006/main">
+            <a:pPr algn="ctr">
+              <a:defRPr sz="1125" b="1">
                 <a:solidFill>
                   <a:srgbClr val="2F785D"/>
                 </a:solidFill>
                 <a:latin typeface="Arial"/>
                 <a:ea typeface="Arial"/>
                 <a:cs typeface="Arial"/>
+              </a:defRPr>
+            </a:pPr>
+            <a:r>
+              <a:rPr sz="1125" b="1">
+                <a:solidFill>
+                  <a:srgbClr val="2F785D"/>
+                </a:solidFill>
+                <a:latin typeface="Arial"/>
+                <a:ea typeface="Arial"/>
+                <a:cs typeface="Arial"/>
               </a:rPr>
-              <a:t>Check the result: Check the result and record a precise transition target.</a:t>
+              <a:t>5</a:t>
+            </a:r>
+          </a:p>
+        </p:txBody>
+      </p:sp>
+      <p:sp>
+        <p:nvSpPr>
+          <p:cNvPr id="25" name="">
+            <a:extLst xmlns:a="http://schemas.openxmlformats.org/drawingml/2006/main">
+              <a:ext uri="{FF2B5EF4-FFF2-40B4-BE49-F238E27FC236}">
+                <a16:creationId xmlns:a16="http://schemas.microsoft.com/office/drawing/2014/main" id="{914C9094-FE2E-475F-9EB8-F54175673582}"/>
+              </a:ext>
+            </a:extLst>
+          </p:cNvPr>
+          <p:cNvSpPr>
+            <a:spLocks xmlns:a="http://schemas.openxmlformats.org/drawingml/2006/main" noGrp="1"/>
+          </p:cNvSpPr>
+          <p:nvPr/>
+        </p:nvSpPr>
+        <p:spPr>
+          <a:xfrm xmlns:a="http://schemas.openxmlformats.org/drawingml/2006/main">
+            <a:off x="1714500" y="4933950"/>
+            <a:ext cx="9525000" cy="638175"/>
+          </a:xfrm>
+          <a:prstGeom xmlns:a="http://schemas.openxmlformats.org/drawingml/2006/main" prst="rect">
+            <a:avLst/>
+          </a:prstGeom>
+          <a:noFill xmlns:a="http://schemas.openxmlformats.org/drawingml/2006/main"/>
+          <a:ln xmlns:a="http://schemas.openxmlformats.org/drawingml/2006/main" w="0">
+            <a:noFill/>
+          </a:ln>
+        </p:spPr>
+        <p:txBody>
+          <a:bodyPr xmlns:a="http://schemas.openxmlformats.org/drawingml/2006/main" anchor="ctr">
+            <a:normAutofit fontScale="100000"/>
+          </a:bodyPr>
+          <a:lstStyle xmlns:a="http://schemas.openxmlformats.org/drawingml/2006/main"/>
+          <a:p xmlns:a="http://schemas.openxmlformats.org/drawingml/2006/main">
+            <a:pPr algn="l">
+              <a:defRPr sz="1575" b="1">
+                <a:solidFill>
+                  <a:srgbClr val="2F785D"/>
+                </a:solidFill>
+                <a:latin typeface="Arial"/>
+                <a:ea typeface="Arial"/>
+                <a:cs typeface="Arial"/>
+              </a:defRPr>
+            </a:pPr>
+            <a:r>
+              <a:rPr sz="1575" b="1">
+                <a:solidFill>
+                  <a:srgbClr val="2F785D"/>
+                </a:solidFill>
+                <a:latin typeface="Arial"/>
+                <a:ea typeface="Arial"/>
+                <a:cs typeface="Arial"/>
+              </a:rPr>
+              <a:t>3/4 = 0.75</a:t>
             </a:r>
           </a:p>
         </p:txBody>
@@ -8841,7 +8995,7 @@
     </p:spTree>
     <p:extLst>
       <p:ext uri="{BB962C8B-B14F-4D97-AF65-F5344CB8AC3E}">
-        <p14:creationId xmlns:p14="http://schemas.microsoft.com/office/powerpoint/2010/main" val="1500127907"/>
+        <p14:creationId xmlns:p14="http://schemas.microsoft.com/office/powerpoint/2010/main" val="2138070559"/>
       </p:ext>
     </p:extLst>
   </p:cSld>
@@ -9078,6 +9232,51 @@
                       </p:childTnLst>
                     </p:cTn>
                   </p:par>
+                  <p:par>
+                    <p:cTn id="23" fill="hold">
+                      <p:stCondLst>
+                        <p:cond delay="indefinite"/>
+                      </p:stCondLst>
+                      <p:childTnLst>
+                        <p:par>
+                          <p:cTn id="24" fill="hold">
+                            <p:stCondLst>
+                              <p:cond delay="0"/>
+                            </p:stCondLst>
+                            <p:childTnLst>
+                              <p:par>
+                                <p:cTn id="25" presetID="1" presetClass="entr" presetSubtype="0" fill="hold" grpId="0" nodeType="clickEffect">
+                                  <p:stCondLst>
+                                    <p:cond delay="0"/>
+                                  </p:stCondLst>
+                                  <p:childTnLst>
+                                    <p:set>
+                                      <p:cBhvr>
+                                        <p:cTn id="26" dur="1" fill="hold">
+                                          <p:stCondLst>
+                                            <p:cond delay="0"/>
+                                          </p:stCondLst>
+                                        </p:cTn>
+                                        <p:tgtEl>
+                                          <p:spTgt spid="25"/>
+                                        </p:tgtEl>
+                                        <p:attrNameLst>
+                                          <p:attrName>style.visibility</p:attrName>
+                                        </p:attrNameLst>
+                                      </p:cBhvr>
+                                      <p:to>
+                                        <p:strVal val="visible"/>
+                                      </p:to>
+                                    </p:set>
+                                  </p:childTnLst>
+                                </p:cTn>
+                              </p:par>
+                            </p:childTnLst>
+                          </p:cTn>
+                        </p:par>
+                      </p:childTnLst>
+                    </p:cTn>
+                  </p:par>
                 </p:childTnLst>
               </p:cTn>
               <p:prevCondLst>
@@ -9105,6 +9304,7 @@
       <p:bldP spid="16" grpId="0"/>
       <p:bldP spid="19" grpId="0"/>
       <p:bldP spid="22" grpId="0"/>
+      <p:bldP spid="25" grpId="0"/>
     </p:bldLst>
   </p:timing>
 </p:sld>
@@ -9134,7 +9334,7 @@
           <p:cNvPr id="15" name="">
             <a:extLst xmlns:a="http://schemas.openxmlformats.org/drawingml/2006/main">
               <a:ext uri="{FF2B5EF4-FFF2-40B4-BE49-F238E27FC236}">
-                <a16:creationId xmlns:a16="http://schemas.microsoft.com/office/drawing/2014/main" id="{4AE362A3-EA9E-4388-927D-6C8D90DB11A5}"/>
+                <a16:creationId xmlns:a16="http://schemas.microsoft.com/office/drawing/2014/main" id="{4337F684-9AD8-4783-8A3B-054CAB6824D1}"/>
               </a:ext>
             </a:extLst>
           </p:cNvPr>
@@ -9166,7 +9366,7 @@
           <p:cNvPr id="2" name="">
             <a:extLst xmlns:a="http://schemas.openxmlformats.org/drawingml/2006/main">
               <a:ext uri="{FF2B5EF4-FFF2-40B4-BE49-F238E27FC236}">
-                <a16:creationId xmlns:a16="http://schemas.microsoft.com/office/drawing/2014/main" id="{FB17A6BE-FA0E-4154-871E-9A58CCF9A08F}"/>
+                <a16:creationId xmlns:a16="http://schemas.microsoft.com/office/drawing/2014/main" id="{36207626-A853-4C1A-9103-180625733A5E}"/>
               </a:ext>
             </a:extLst>
           </p:cNvPr>
@@ -9223,7 +9423,7 @@
           <p:cNvPr id="3" name="">
             <a:extLst xmlns:a="http://schemas.openxmlformats.org/drawingml/2006/main">
               <a:ext uri="{FF2B5EF4-FFF2-40B4-BE49-F238E27FC236}">
-                <a16:creationId xmlns:a16="http://schemas.microsoft.com/office/drawing/2014/main" id="{AEA88571-8A79-428B-B4C8-E0F22A37FD38}"/>
+                <a16:creationId xmlns:a16="http://schemas.microsoft.com/office/drawing/2014/main" id="{7330BBA2-20D3-4B4F-B055-4DFC96CEB33F}"/>
               </a:ext>
             </a:extLst>
           </p:cNvPr>
@@ -9255,7 +9455,7 @@
           <p:cNvPr id="4" name="">
             <a:extLst xmlns:a="http://schemas.openxmlformats.org/drawingml/2006/main">
               <a:ext uri="{FF2B5EF4-FFF2-40B4-BE49-F238E27FC236}">
-                <a16:creationId xmlns:a16="http://schemas.microsoft.com/office/drawing/2014/main" id="{620C1C9F-C029-45D9-8868-DF8FB4651597}"/>
+                <a16:creationId xmlns:a16="http://schemas.microsoft.com/office/drawing/2014/main" id="{80F565D2-AA8F-4153-8CB5-705BED7748BE}"/>
               </a:ext>
             </a:extLst>
           </p:cNvPr>
@@ -9312,7 +9512,7 @@
           <p:cNvPr id="5" name="">
             <a:extLst xmlns:a="http://schemas.openxmlformats.org/drawingml/2006/main">
               <a:ext uri="{FF2B5EF4-FFF2-40B4-BE49-F238E27FC236}">
-                <a16:creationId xmlns:a16="http://schemas.microsoft.com/office/drawing/2014/main" id="{E0D1B785-8816-4ED4-AFE6-8D0467A72790}"/>
+                <a16:creationId xmlns:a16="http://schemas.microsoft.com/office/drawing/2014/main" id="{5DA5E278-C873-4756-B1A4-863718197857}"/>
               </a:ext>
             </a:extLst>
           </p:cNvPr>
@@ -9369,7 +9569,7 @@
           <p:cNvPr id="6" name="">
             <a:extLst xmlns:a="http://schemas.openxmlformats.org/drawingml/2006/main">
               <a:ext uri="{FF2B5EF4-FFF2-40B4-BE49-F238E27FC236}">
-                <a16:creationId xmlns:a16="http://schemas.microsoft.com/office/drawing/2014/main" id="{33B50D18-9F48-463E-998A-1B100C0EE8DF}"/>
+                <a16:creationId xmlns:a16="http://schemas.microsoft.com/office/drawing/2014/main" id="{7AEE9D2A-5D76-4457-BA1D-0233F7537DF8}"/>
               </a:ext>
             </a:extLst>
           </p:cNvPr>
@@ -9426,7 +9626,7 @@
           <p:cNvPr id="7" name="">
             <a:extLst xmlns:a="http://schemas.openxmlformats.org/drawingml/2006/main">
               <a:ext uri="{FF2B5EF4-FFF2-40B4-BE49-F238E27FC236}">
-                <a16:creationId xmlns:a16="http://schemas.microsoft.com/office/drawing/2014/main" id="{39D0DBDB-F494-43E5-B8BC-912EDC810930}"/>
+                <a16:creationId xmlns:a16="http://schemas.microsoft.com/office/drawing/2014/main" id="{96626B12-1147-4942-8178-DD147B4BC7A6}"/>
               </a:ext>
             </a:extLst>
           </p:cNvPr>
@@ -9458,7 +9658,7 @@
           <p:cNvPr id="8" name="">
             <a:extLst xmlns:a="http://schemas.openxmlformats.org/drawingml/2006/main">
               <a:ext uri="{FF2B5EF4-FFF2-40B4-BE49-F238E27FC236}">
-                <a16:creationId xmlns:a16="http://schemas.microsoft.com/office/drawing/2014/main" id="{5FF356B4-8F55-45EE-BBE5-E5F6AF4CAFD5}"/>
+                <a16:creationId xmlns:a16="http://schemas.microsoft.com/office/drawing/2014/main" id="{0E20E65D-8E9A-443B-A44C-09BD506C47FD}"/>
               </a:ext>
             </a:extLst>
           </p:cNvPr>
@@ -9515,7 +9715,7 @@
           <p:cNvPr id="9" name="">
             <a:extLst xmlns:a="http://schemas.openxmlformats.org/drawingml/2006/main">
               <a:ext uri="{FF2B5EF4-FFF2-40B4-BE49-F238E27FC236}">
-                <a16:creationId xmlns:a16="http://schemas.microsoft.com/office/drawing/2014/main" id="{23872AEA-9E6F-41F7-B4F7-52D73E340A29}"/>
+                <a16:creationId xmlns:a16="http://schemas.microsoft.com/office/drawing/2014/main" id="{CB170BE5-BACC-4375-8878-5A09B9071B9C}"/>
               </a:ext>
             </a:extLst>
           </p:cNvPr>
@@ -9572,7 +9772,7 @@
           <p:cNvPr id="10" name="">
             <a:extLst xmlns:a="http://schemas.openxmlformats.org/drawingml/2006/main">
               <a:ext uri="{FF2B5EF4-FFF2-40B4-BE49-F238E27FC236}">
-                <a16:creationId xmlns:a16="http://schemas.microsoft.com/office/drawing/2014/main" id="{ECE5FEEF-2686-43F9-9730-7CCD3B088AD0}"/>
+                <a16:creationId xmlns:a16="http://schemas.microsoft.com/office/drawing/2014/main" id="{912B259E-230A-4A27-8F89-BF579196E4BD}"/>
               </a:ext>
             </a:extLst>
           </p:cNvPr>
@@ -9629,7 +9829,7 @@
           <p:cNvPr id="11" name="">
             <a:extLst xmlns:a="http://schemas.openxmlformats.org/drawingml/2006/main">
               <a:ext uri="{FF2B5EF4-FFF2-40B4-BE49-F238E27FC236}">
-                <a16:creationId xmlns:a16="http://schemas.microsoft.com/office/drawing/2014/main" id="{7FE25A33-2EE4-4FD9-9DA1-07C7FA79CEA6}"/>
+                <a16:creationId xmlns:a16="http://schemas.microsoft.com/office/drawing/2014/main" id="{882F5C22-C86B-42A6-8AD2-575B370BB12A}"/>
               </a:ext>
             </a:extLst>
           </p:cNvPr>
@@ -9686,7 +9886,7 @@
           <p:cNvPr id="12" name="">
             <a:extLst xmlns:a="http://schemas.openxmlformats.org/drawingml/2006/main">
               <a:ext uri="{FF2B5EF4-FFF2-40B4-BE49-F238E27FC236}">
-                <a16:creationId xmlns:a16="http://schemas.microsoft.com/office/drawing/2014/main" id="{14A3C77D-B6A3-435E-A889-AE49238DB3C2}"/>
+                <a16:creationId xmlns:a16="http://schemas.microsoft.com/office/drawing/2014/main" id="{D8DDE0EA-CB77-428A-9A46-31C6252AC98D}"/>
               </a:ext>
             </a:extLst>
           </p:cNvPr>
@@ -9718,7 +9918,7 @@
           <p:cNvPr id="13" name="">
             <a:extLst xmlns:a="http://schemas.openxmlformats.org/drawingml/2006/main">
               <a:ext uri="{FF2B5EF4-FFF2-40B4-BE49-F238E27FC236}">
-                <a16:creationId xmlns:a16="http://schemas.microsoft.com/office/drawing/2014/main" id="{D214A6F4-05DA-4965-9B5B-AF3F50A8150A}"/>
+                <a16:creationId xmlns:a16="http://schemas.microsoft.com/office/drawing/2014/main" id="{5D5D39B3-8D87-4DB1-9A2A-0A62636174A5}"/>
               </a:ext>
             </a:extLst>
           </p:cNvPr>
@@ -9775,7 +9975,7 @@
           <p:cNvPr id="14" name="">
             <a:extLst xmlns:a="http://schemas.openxmlformats.org/drawingml/2006/main">
               <a:ext uri="{FF2B5EF4-FFF2-40B4-BE49-F238E27FC236}">
-                <a16:creationId xmlns:a16="http://schemas.microsoft.com/office/drawing/2014/main" id="{05BD15AC-FA32-4861-84BC-0CC9BE7A0836}"/>
+                <a16:creationId xmlns:a16="http://schemas.microsoft.com/office/drawing/2014/main" id="{2964CB37-1FA5-4621-964C-6CE653DF37BB}"/>
               </a:ext>
             </a:extLst>
           </p:cNvPr>
@@ -9830,7 +10030,7 @@
     </p:spTree>
     <p:extLst>
       <p:ext uri="{BB962C8B-B14F-4D97-AF65-F5344CB8AC3E}">
-        <p14:creationId xmlns:p14="http://schemas.microsoft.com/office/powerpoint/2010/main" val="897171835"/>
+        <p14:creationId xmlns:p14="http://schemas.microsoft.com/office/powerpoint/2010/main" val="321877374"/>
       </p:ext>
     </p:extLst>
   </p:cSld>
@@ -10031,7 +10231,7 @@
           <p:cNvPr id="16" name="">
             <a:extLst xmlns:a="http://schemas.openxmlformats.org/drawingml/2006/main">
               <a:ext uri="{FF2B5EF4-FFF2-40B4-BE49-F238E27FC236}">
-                <a16:creationId xmlns:a16="http://schemas.microsoft.com/office/drawing/2014/main" id="{B3042D8B-BECD-4AAB-8AD4-6A4F767ACFAA}"/>
+                <a16:creationId xmlns:a16="http://schemas.microsoft.com/office/drawing/2014/main" id="{5F967395-3824-4C22-8CA3-27389EF006AB}"/>
               </a:ext>
             </a:extLst>
           </p:cNvPr>
@@ -10063,7 +10263,7 @@
           <p:cNvPr id="2" name="">
             <a:extLst xmlns:a="http://schemas.openxmlformats.org/drawingml/2006/main">
               <a:ext uri="{FF2B5EF4-FFF2-40B4-BE49-F238E27FC236}">
-                <a16:creationId xmlns:a16="http://schemas.microsoft.com/office/drawing/2014/main" id="{443B4A81-02BB-4416-A94F-7C280D32425B}"/>
+                <a16:creationId xmlns:a16="http://schemas.microsoft.com/office/drawing/2014/main" id="{AD1F18D1-371B-48B7-8975-B5406DE7DA04}"/>
               </a:ext>
             </a:extLst>
           </p:cNvPr>
@@ -10120,7 +10320,7 @@
           <p:cNvPr id="3" name="">
             <a:extLst xmlns:a="http://schemas.openxmlformats.org/drawingml/2006/main">
               <a:ext uri="{FF2B5EF4-FFF2-40B4-BE49-F238E27FC236}">
-                <a16:creationId xmlns:a16="http://schemas.microsoft.com/office/drawing/2014/main" id="{6CA5DAC2-93A2-4BD7-A260-F715634FBF96}"/>
+                <a16:creationId xmlns:a16="http://schemas.microsoft.com/office/drawing/2014/main" id="{C40930E9-07FB-42DC-8379-3CA15DFD9026}"/>
               </a:ext>
             </a:extLst>
           </p:cNvPr>
@@ -10152,7 +10352,7 @@
           <p:cNvPr id="4" name="">
             <a:extLst xmlns:a="http://schemas.openxmlformats.org/drawingml/2006/main">
               <a:ext uri="{FF2B5EF4-FFF2-40B4-BE49-F238E27FC236}">
-                <a16:creationId xmlns:a16="http://schemas.microsoft.com/office/drawing/2014/main" id="{196F5177-BEBD-4686-BF36-1BC033A3AA7C}"/>
+                <a16:creationId xmlns:a16="http://schemas.microsoft.com/office/drawing/2014/main" id="{76FCFE96-3C0F-4C94-BBE9-4674660976AF}"/>
               </a:ext>
             </a:extLst>
           </p:cNvPr>
@@ -10209,7 +10409,7 @@
           <p:cNvPr id="5" name="">
             <a:extLst xmlns:a="http://schemas.openxmlformats.org/drawingml/2006/main">
               <a:ext uri="{FF2B5EF4-FFF2-40B4-BE49-F238E27FC236}">
-                <a16:creationId xmlns:a16="http://schemas.microsoft.com/office/drawing/2014/main" id="{6BA7AAE7-E8D6-4448-8A0E-E5A8F4F180C9}"/>
+                <a16:creationId xmlns:a16="http://schemas.microsoft.com/office/drawing/2014/main" id="{5F712E06-8FA2-482B-AC20-D01B411C4D12}"/>
               </a:ext>
             </a:extLst>
           </p:cNvPr>
@@ -10266,7 +10466,7 @@
           <p:cNvPr id="6" name="">
             <a:extLst xmlns:a="http://schemas.openxmlformats.org/drawingml/2006/main">
               <a:ext uri="{FF2B5EF4-FFF2-40B4-BE49-F238E27FC236}">
-                <a16:creationId xmlns:a16="http://schemas.microsoft.com/office/drawing/2014/main" id="{181BB35A-DA7F-41DE-9270-5454D710C223}"/>
+                <a16:creationId xmlns:a16="http://schemas.microsoft.com/office/drawing/2014/main" id="{D6F6364E-A6F3-4F2D-9EF6-832484562CBA}"/>
               </a:ext>
             </a:extLst>
           </p:cNvPr>
@@ -10323,7 +10523,7 @@
           <p:cNvPr id="7" name="">
             <a:extLst xmlns:a="http://schemas.openxmlformats.org/drawingml/2006/main">
               <a:ext uri="{FF2B5EF4-FFF2-40B4-BE49-F238E27FC236}">
-                <a16:creationId xmlns:a16="http://schemas.microsoft.com/office/drawing/2014/main" id="{8684EFB3-A6FF-43F8-8D4A-BBA3AFE100ED}"/>
+                <a16:creationId xmlns:a16="http://schemas.microsoft.com/office/drawing/2014/main" id="{CF50C77A-4189-45C5-BBDB-CAE43E6CCA8D}"/>
               </a:ext>
             </a:extLst>
           </p:cNvPr>
@@ -10355,7 +10555,7 @@
           <p:cNvPr id="8" name="">
             <a:extLst xmlns:a="http://schemas.openxmlformats.org/drawingml/2006/main">
               <a:ext uri="{FF2B5EF4-FFF2-40B4-BE49-F238E27FC236}">
-                <a16:creationId xmlns:a16="http://schemas.microsoft.com/office/drawing/2014/main" id="{667EB596-D23A-483C-9DFB-1C99449D4EDF}"/>
+                <a16:creationId xmlns:a16="http://schemas.microsoft.com/office/drawing/2014/main" id="{61C03290-F3CF-4670-9E0B-BFF669D29AB2}"/>
               </a:ext>
             </a:extLst>
           </p:cNvPr>
@@ -10412,7 +10612,7 @@
           <p:cNvPr id="9" name="">
             <a:extLst xmlns:a="http://schemas.openxmlformats.org/drawingml/2006/main">
               <a:ext uri="{FF2B5EF4-FFF2-40B4-BE49-F238E27FC236}">
-                <a16:creationId xmlns:a16="http://schemas.microsoft.com/office/drawing/2014/main" id="{4BF1CA52-7598-4878-A7C5-A368780727D5}"/>
+                <a16:creationId xmlns:a16="http://schemas.microsoft.com/office/drawing/2014/main" id="{48EC7420-A336-466C-B06E-A18BC12327E2}"/>
               </a:ext>
             </a:extLst>
           </p:cNvPr>
@@ -10469,7 +10669,7 @@
           <p:cNvPr id="10" name="">
             <a:extLst xmlns:a="http://schemas.openxmlformats.org/drawingml/2006/main">
               <a:ext uri="{FF2B5EF4-FFF2-40B4-BE49-F238E27FC236}">
-                <a16:creationId xmlns:a16="http://schemas.microsoft.com/office/drawing/2014/main" id="{D00B0B28-FEF6-4FCE-B685-F77124D98DE8}"/>
+                <a16:creationId xmlns:a16="http://schemas.microsoft.com/office/drawing/2014/main" id="{372B7700-B154-4759-9E49-A770E959A4CD}"/>
               </a:ext>
             </a:extLst>
           </p:cNvPr>
@@ -10526,7 +10726,7 @@
           <p:cNvPr id="11" name="">
             <a:extLst xmlns:a="http://schemas.openxmlformats.org/drawingml/2006/main">
               <a:ext uri="{FF2B5EF4-FFF2-40B4-BE49-F238E27FC236}">
-                <a16:creationId xmlns:a16="http://schemas.microsoft.com/office/drawing/2014/main" id="{5EBA4B4F-9055-4EB2-814E-8AD44F1C77FF}"/>
+                <a16:creationId xmlns:a16="http://schemas.microsoft.com/office/drawing/2014/main" id="{36197925-27C8-4670-BC9C-261014AAC262}"/>
               </a:ext>
             </a:extLst>
           </p:cNvPr>
@@ -10583,7 +10783,7 @@
           <p:cNvPr id="12" name="">
             <a:extLst xmlns:a="http://schemas.openxmlformats.org/drawingml/2006/main">
               <a:ext uri="{FF2B5EF4-FFF2-40B4-BE49-F238E27FC236}">
-                <a16:creationId xmlns:a16="http://schemas.microsoft.com/office/drawing/2014/main" id="{C97314AD-00BB-42CE-9984-A4E015D2B196}"/>
+                <a16:creationId xmlns:a16="http://schemas.microsoft.com/office/drawing/2014/main" id="{F6A9A180-DA1A-4078-8683-B6A7D877C4B0}"/>
               </a:ext>
             </a:extLst>
           </p:cNvPr>
@@ -10640,7 +10840,7 @@
           <p:cNvPr id="13" name="">
             <a:extLst xmlns:a="http://schemas.openxmlformats.org/drawingml/2006/main">
               <a:ext uri="{FF2B5EF4-FFF2-40B4-BE49-F238E27FC236}">
-                <a16:creationId xmlns:a16="http://schemas.microsoft.com/office/drawing/2014/main" id="{53F3199B-7979-4EC7-A7EB-82654BA0CF51}"/>
+                <a16:creationId xmlns:a16="http://schemas.microsoft.com/office/drawing/2014/main" id="{7C97AD4A-F85F-4864-A002-0FFF9A3CE2A6}"/>
               </a:ext>
             </a:extLst>
           </p:cNvPr>
@@ -10697,7 +10897,7 @@
           <p:cNvPr id="14" name="">
             <a:extLst xmlns:a="http://schemas.openxmlformats.org/drawingml/2006/main">
               <a:ext uri="{FF2B5EF4-FFF2-40B4-BE49-F238E27FC236}">
-                <a16:creationId xmlns:a16="http://schemas.microsoft.com/office/drawing/2014/main" id="{D293280D-5240-436D-81BA-E93E71B4D397}"/>
+                <a16:creationId xmlns:a16="http://schemas.microsoft.com/office/drawing/2014/main" id="{BEAF3B5A-F5C0-4603-B1F9-5A73CCF7D572}"/>
               </a:ext>
             </a:extLst>
           </p:cNvPr>
@@ -10754,7 +10954,7 @@
           <p:cNvPr id="15" name="">
             <a:extLst xmlns:a="http://schemas.openxmlformats.org/drawingml/2006/main">
               <a:ext uri="{FF2B5EF4-FFF2-40B4-BE49-F238E27FC236}">
-                <a16:creationId xmlns:a16="http://schemas.microsoft.com/office/drawing/2014/main" id="{CDFF7F9E-AAD7-4204-8978-B65472E1DE88}"/>
+                <a16:creationId xmlns:a16="http://schemas.microsoft.com/office/drawing/2014/main" id="{701E3EA9-79D8-47E3-8010-4FF3192B203A}"/>
               </a:ext>
             </a:extLst>
           </p:cNvPr>
@@ -10809,7 +11009,7 @@
     </p:spTree>
     <p:extLst>
       <p:ext uri="{BB962C8B-B14F-4D97-AF65-F5344CB8AC3E}">
-        <p14:creationId xmlns:p14="http://schemas.microsoft.com/office/powerpoint/2010/main" val="1235232586"/>
+        <p14:creationId xmlns:p14="http://schemas.microsoft.com/office/powerpoint/2010/main" val="1692209168"/>
       </p:ext>
     </p:extLst>
   </p:cSld>
@@ -10964,7 +11164,7 @@
           <p:cNvPr id="16" name="">
             <a:extLst xmlns:a="http://schemas.openxmlformats.org/drawingml/2006/main">
               <a:ext uri="{FF2B5EF4-FFF2-40B4-BE49-F238E27FC236}">
-                <a16:creationId xmlns:a16="http://schemas.microsoft.com/office/drawing/2014/main" id="{3883DDAA-5F6E-4886-A9B3-068C89CF4040}"/>
+                <a16:creationId xmlns:a16="http://schemas.microsoft.com/office/drawing/2014/main" id="{E6B20E6F-C56D-448F-BE46-50998ABD67D0}"/>
               </a:ext>
             </a:extLst>
           </p:cNvPr>
@@ -10996,7 +11196,7 @@
           <p:cNvPr id="2" name="">
             <a:extLst xmlns:a="http://schemas.openxmlformats.org/drawingml/2006/main">
               <a:ext uri="{FF2B5EF4-FFF2-40B4-BE49-F238E27FC236}">
-                <a16:creationId xmlns:a16="http://schemas.microsoft.com/office/drawing/2014/main" id="{47D1A914-54FC-455C-9B2B-10BE25077DCD}"/>
+                <a16:creationId xmlns:a16="http://schemas.microsoft.com/office/drawing/2014/main" id="{F9DEB7C7-A092-498F-B560-14BF0BE671B8}"/>
               </a:ext>
             </a:extLst>
           </p:cNvPr>
@@ -11053,7 +11253,7 @@
           <p:cNvPr id="3" name="">
             <a:extLst xmlns:a="http://schemas.openxmlformats.org/drawingml/2006/main">
               <a:ext uri="{FF2B5EF4-FFF2-40B4-BE49-F238E27FC236}">
-                <a16:creationId xmlns:a16="http://schemas.microsoft.com/office/drawing/2014/main" id="{528D6603-3779-4D2F-9642-030482C6B3E6}"/>
+                <a16:creationId xmlns:a16="http://schemas.microsoft.com/office/drawing/2014/main" id="{87CBF312-F84B-4990-B0DC-B3AF5A781DE5}"/>
               </a:ext>
             </a:extLst>
           </p:cNvPr>
@@ -11085,7 +11285,7 @@
           <p:cNvPr id="4" name="">
             <a:extLst xmlns:a="http://schemas.openxmlformats.org/drawingml/2006/main">
               <a:ext uri="{FF2B5EF4-FFF2-40B4-BE49-F238E27FC236}">
-                <a16:creationId xmlns:a16="http://schemas.microsoft.com/office/drawing/2014/main" id="{DFEB827F-9DCC-4CA6-AC41-EE7563687B99}"/>
+                <a16:creationId xmlns:a16="http://schemas.microsoft.com/office/drawing/2014/main" id="{2E3CFE24-8D9E-4773-998F-CF884588ACFF}"/>
               </a:ext>
             </a:extLst>
           </p:cNvPr>
@@ -11142,7 +11342,7 @@
           <p:cNvPr id="5" name="">
             <a:extLst xmlns:a="http://schemas.openxmlformats.org/drawingml/2006/main">
               <a:ext uri="{FF2B5EF4-FFF2-40B4-BE49-F238E27FC236}">
-                <a16:creationId xmlns:a16="http://schemas.microsoft.com/office/drawing/2014/main" id="{01248A40-8D52-413F-BBAB-A007880F14E9}"/>
+                <a16:creationId xmlns:a16="http://schemas.microsoft.com/office/drawing/2014/main" id="{5A9464E0-3427-498F-86FD-BB6F9EDDDFB0}"/>
               </a:ext>
             </a:extLst>
           </p:cNvPr>
@@ -11199,7 +11399,7 @@
           <p:cNvPr id="6" name="">
             <a:extLst xmlns:a="http://schemas.openxmlformats.org/drawingml/2006/main">
               <a:ext uri="{FF2B5EF4-FFF2-40B4-BE49-F238E27FC236}">
-                <a16:creationId xmlns:a16="http://schemas.microsoft.com/office/drawing/2014/main" id="{6644CD07-F4E7-41BA-BAA9-3127669868BE}"/>
+                <a16:creationId xmlns:a16="http://schemas.microsoft.com/office/drawing/2014/main" id="{6B48AA3C-B2FF-46D5-859B-963531A65909}"/>
               </a:ext>
             </a:extLst>
           </p:cNvPr>
@@ -11256,7 +11456,7 @@
           <p:cNvPr id="7" name="">
             <a:extLst xmlns:a="http://schemas.openxmlformats.org/drawingml/2006/main">
               <a:ext uri="{FF2B5EF4-FFF2-40B4-BE49-F238E27FC236}">
-                <a16:creationId xmlns:a16="http://schemas.microsoft.com/office/drawing/2014/main" id="{4E09F837-5747-43BE-9725-0D9E253BEAE9}"/>
+                <a16:creationId xmlns:a16="http://schemas.microsoft.com/office/drawing/2014/main" id="{B0ADFCE4-2D85-446A-B1A4-9F3F52072A11}"/>
               </a:ext>
             </a:extLst>
           </p:cNvPr>
@@ -11288,7 +11488,7 @@
           <p:cNvPr id="8" name="">
             <a:extLst xmlns:a="http://schemas.openxmlformats.org/drawingml/2006/main">
               <a:ext uri="{FF2B5EF4-FFF2-40B4-BE49-F238E27FC236}">
-                <a16:creationId xmlns:a16="http://schemas.microsoft.com/office/drawing/2014/main" id="{88C321AE-2666-4083-BB13-E7DAA21D9CE7}"/>
+                <a16:creationId xmlns:a16="http://schemas.microsoft.com/office/drawing/2014/main" id="{972AFC28-225A-49AF-BF9D-6449E06B8ADA}"/>
               </a:ext>
             </a:extLst>
           </p:cNvPr>
@@ -11345,7 +11545,7 @@
           <p:cNvPr id="9" name="">
             <a:extLst xmlns:a="http://schemas.openxmlformats.org/drawingml/2006/main">
               <a:ext uri="{FF2B5EF4-FFF2-40B4-BE49-F238E27FC236}">
-                <a16:creationId xmlns:a16="http://schemas.microsoft.com/office/drawing/2014/main" id="{F687B954-2EDD-4912-A69F-F4B5C99A81F3}"/>
+                <a16:creationId xmlns:a16="http://schemas.microsoft.com/office/drawing/2014/main" id="{C3290C5D-BC7B-4BD8-B3AE-1DA0229C5930}"/>
               </a:ext>
             </a:extLst>
           </p:cNvPr>
@@ -11406,7 +11606,7 @@
           <p:nvPr/>
         </p:nvPicPr>
         <p:blipFill>
-          <a:blip xmlns:r="http://schemas.openxmlformats.org/officeDocument/2006/relationships" xmlns:a="http://schemas.openxmlformats.org/drawingml/2006/main" r:embed="R41987f6840434556"/>
+          <a:blip xmlns:r="http://schemas.openxmlformats.org/officeDocument/2006/relationships" xmlns:a="http://schemas.openxmlformats.org/drawingml/2006/main" r:embed="R9ceb07cc124b4290"/>
           <a:stretch xmlns:a="http://schemas.openxmlformats.org/drawingml/2006/main"/>
         </p:blipFill>
         <p:spPr>
@@ -11424,7 +11624,7 @@
           <p:cNvPr id="11" name="">
             <a:extLst xmlns:a="http://schemas.openxmlformats.org/drawingml/2006/main">
               <a:ext uri="{FF2B5EF4-FFF2-40B4-BE49-F238E27FC236}">
-                <a16:creationId xmlns:a16="http://schemas.microsoft.com/office/drawing/2014/main" id="{DC41322F-418D-442F-8002-7A739C3965FF}"/>
+                <a16:creationId xmlns:a16="http://schemas.microsoft.com/office/drawing/2014/main" id="{7FF24D82-EE19-458A-92C5-4A1A0D341243}"/>
               </a:ext>
             </a:extLst>
           </p:cNvPr>
@@ -11481,7 +11681,7 @@
           <p:cNvPr id="12" name="">
             <a:extLst xmlns:a="http://schemas.openxmlformats.org/drawingml/2006/main">
               <a:ext uri="{FF2B5EF4-FFF2-40B4-BE49-F238E27FC236}">
-                <a16:creationId xmlns:a16="http://schemas.microsoft.com/office/drawing/2014/main" id="{8E387A11-5249-4086-BBCA-FE78E76426D4}"/>
+                <a16:creationId xmlns:a16="http://schemas.microsoft.com/office/drawing/2014/main" id="{1B2E6480-9026-4D5C-A523-8C6D826B47B2}"/>
               </a:ext>
             </a:extLst>
           </p:cNvPr>
@@ -11538,7 +11738,7 @@
           <p:cNvPr id="13" name="">
             <a:extLst xmlns:a="http://schemas.openxmlformats.org/drawingml/2006/main">
               <a:ext uri="{FF2B5EF4-FFF2-40B4-BE49-F238E27FC236}">
-                <a16:creationId xmlns:a16="http://schemas.microsoft.com/office/drawing/2014/main" id="{4B6256FF-2488-470C-9B3C-8C5A38513264}"/>
+                <a16:creationId xmlns:a16="http://schemas.microsoft.com/office/drawing/2014/main" id="{4491A888-1B56-40E1-80F6-4B9530597BDF}"/>
               </a:ext>
             </a:extLst>
           </p:cNvPr>
@@ -11570,7 +11770,7 @@
           <p:cNvPr id="14" name="">
             <a:extLst xmlns:a="http://schemas.openxmlformats.org/drawingml/2006/main">
               <a:ext uri="{FF2B5EF4-FFF2-40B4-BE49-F238E27FC236}">
-                <a16:creationId xmlns:a16="http://schemas.microsoft.com/office/drawing/2014/main" id="{23937C0D-8B90-4A4F-A924-B88D79515532}"/>
+                <a16:creationId xmlns:a16="http://schemas.microsoft.com/office/drawing/2014/main" id="{C819DA56-5E0E-4480-8B68-663B2EE5E17C}"/>
               </a:ext>
             </a:extLst>
           </p:cNvPr>
@@ -11627,7 +11827,7 @@
           <p:cNvPr id="15" name="">
             <a:extLst xmlns:a="http://schemas.openxmlformats.org/drawingml/2006/main">
               <a:ext uri="{FF2B5EF4-FFF2-40B4-BE49-F238E27FC236}">
-                <a16:creationId xmlns:a16="http://schemas.microsoft.com/office/drawing/2014/main" id="{0E932211-A1CA-45EF-98CE-BC0B81EB1D68}"/>
+                <a16:creationId xmlns:a16="http://schemas.microsoft.com/office/drawing/2014/main" id="{C3FFFE50-5956-4FD3-BCA7-43F6D86AF88E}"/>
               </a:ext>
             </a:extLst>
           </p:cNvPr>
@@ -11682,7 +11882,7 @@
     </p:spTree>
     <p:extLst>
       <p:ext uri="{BB962C8B-B14F-4D97-AF65-F5344CB8AC3E}">
-        <p14:creationId xmlns:p14="http://schemas.microsoft.com/office/powerpoint/2010/main" val="1434869586"/>
+        <p14:creationId xmlns:p14="http://schemas.microsoft.com/office/powerpoint/2010/main" val="1377428043"/>
       </p:ext>
     </p:extLst>
   </p:cSld>
@@ -11837,7 +12037,7 @@
           <p:cNvPr id="23" name="">
             <a:extLst xmlns:a="http://schemas.openxmlformats.org/drawingml/2006/main">
               <a:ext uri="{FF2B5EF4-FFF2-40B4-BE49-F238E27FC236}">
-                <a16:creationId xmlns:a16="http://schemas.microsoft.com/office/drawing/2014/main" id="{51A48142-75F2-4B8F-96E5-854E44357176}"/>
+                <a16:creationId xmlns:a16="http://schemas.microsoft.com/office/drawing/2014/main" id="{36B5F043-2663-4095-B2F1-57E5FFD4390E}"/>
               </a:ext>
             </a:extLst>
           </p:cNvPr>
@@ -11869,7 +12069,7 @@
           <p:cNvPr id="2" name="">
             <a:extLst xmlns:a="http://schemas.openxmlformats.org/drawingml/2006/main">
               <a:ext uri="{FF2B5EF4-FFF2-40B4-BE49-F238E27FC236}">
-                <a16:creationId xmlns:a16="http://schemas.microsoft.com/office/drawing/2014/main" id="{511A1836-789C-4BC9-BC0D-1650F71BAED6}"/>
+                <a16:creationId xmlns:a16="http://schemas.microsoft.com/office/drawing/2014/main" id="{12DDC083-12A6-4889-8899-FC53E011A5B7}"/>
               </a:ext>
             </a:extLst>
           </p:cNvPr>
@@ -11926,7 +12126,7 @@
           <p:cNvPr id="3" name="">
             <a:extLst xmlns:a="http://schemas.openxmlformats.org/drawingml/2006/main">
               <a:ext uri="{FF2B5EF4-FFF2-40B4-BE49-F238E27FC236}">
-                <a16:creationId xmlns:a16="http://schemas.microsoft.com/office/drawing/2014/main" id="{E0842ABD-834C-4B10-9281-5C8C19493D11}"/>
+                <a16:creationId xmlns:a16="http://schemas.microsoft.com/office/drawing/2014/main" id="{B6243FB9-BBA5-495F-A8D7-5131EECD628D}"/>
               </a:ext>
             </a:extLst>
           </p:cNvPr>
@@ -11958,7 +12158,7 @@
           <p:cNvPr id="4" name="">
             <a:extLst xmlns:a="http://schemas.openxmlformats.org/drawingml/2006/main">
               <a:ext uri="{FF2B5EF4-FFF2-40B4-BE49-F238E27FC236}">
-                <a16:creationId xmlns:a16="http://schemas.microsoft.com/office/drawing/2014/main" id="{0231E8D7-33C7-4F63-ACB7-87CAD3F0FF62}"/>
+                <a16:creationId xmlns:a16="http://schemas.microsoft.com/office/drawing/2014/main" id="{2B38D598-EA37-47FC-B6A6-69BAD2FD1538}"/>
               </a:ext>
             </a:extLst>
           </p:cNvPr>
@@ -12015,7 +12215,7 @@
           <p:cNvPr id="5" name="">
             <a:extLst xmlns:a="http://schemas.openxmlformats.org/drawingml/2006/main">
               <a:ext uri="{FF2B5EF4-FFF2-40B4-BE49-F238E27FC236}">
-                <a16:creationId xmlns:a16="http://schemas.microsoft.com/office/drawing/2014/main" id="{F899B173-4BDB-4532-AFF6-48446E50A3FD}"/>
+                <a16:creationId xmlns:a16="http://schemas.microsoft.com/office/drawing/2014/main" id="{B138CA66-953F-40D4-9851-91507068F66F}"/>
               </a:ext>
             </a:extLst>
           </p:cNvPr>
@@ -12072,7 +12272,7 @@
           <p:cNvPr id="6" name="">
             <a:extLst xmlns:a="http://schemas.openxmlformats.org/drawingml/2006/main">
               <a:ext uri="{FF2B5EF4-FFF2-40B4-BE49-F238E27FC236}">
-                <a16:creationId xmlns:a16="http://schemas.microsoft.com/office/drawing/2014/main" id="{70BB4DC6-2F12-4C15-AE9F-917CB3C79C0E}"/>
+                <a16:creationId xmlns:a16="http://schemas.microsoft.com/office/drawing/2014/main" id="{4F279A78-09E9-4AB3-8215-C73A4040694A}"/>
               </a:ext>
             </a:extLst>
           </p:cNvPr>
@@ -12129,7 +12329,7 @@
           <p:cNvPr id="7" name="">
             <a:extLst xmlns:a="http://schemas.openxmlformats.org/drawingml/2006/main">
               <a:ext uri="{FF2B5EF4-FFF2-40B4-BE49-F238E27FC236}">
-                <a16:creationId xmlns:a16="http://schemas.microsoft.com/office/drawing/2014/main" id="{4737554E-E78F-4C3A-8F8F-17EC58298E60}"/>
+                <a16:creationId xmlns:a16="http://schemas.microsoft.com/office/drawing/2014/main" id="{968C9D71-EE3A-4064-BB1A-3B53CD62603C}"/>
               </a:ext>
             </a:extLst>
           </p:cNvPr>
@@ -12161,7 +12361,7 @@
           <p:cNvPr id="8" name="">
             <a:extLst xmlns:a="http://schemas.openxmlformats.org/drawingml/2006/main">
               <a:ext uri="{FF2B5EF4-FFF2-40B4-BE49-F238E27FC236}">
-                <a16:creationId xmlns:a16="http://schemas.microsoft.com/office/drawing/2014/main" id="{259A75C3-7FFF-4A4F-8B04-AA27752387D9}"/>
+                <a16:creationId xmlns:a16="http://schemas.microsoft.com/office/drawing/2014/main" id="{8A93A0FD-6F24-40F8-A199-91F6021CD50D}"/>
               </a:ext>
             </a:extLst>
           </p:cNvPr>
@@ -12218,7 +12418,7 @@
           <p:cNvPr id="9" name="">
             <a:extLst xmlns:a="http://schemas.openxmlformats.org/drawingml/2006/main">
               <a:ext uri="{FF2B5EF4-FFF2-40B4-BE49-F238E27FC236}">
-                <a16:creationId xmlns:a16="http://schemas.microsoft.com/office/drawing/2014/main" id="{4992905F-1671-4A5A-884C-432545107D1C}"/>
+                <a16:creationId xmlns:a16="http://schemas.microsoft.com/office/drawing/2014/main" id="{11A769BD-0EF3-421F-A7B5-1CDF6C2E6361}"/>
               </a:ext>
             </a:extLst>
           </p:cNvPr>
@@ -12275,7 +12475,7 @@
           <p:cNvPr id="10" name="">
             <a:extLst xmlns:a="http://schemas.openxmlformats.org/drawingml/2006/main">
               <a:ext uri="{FF2B5EF4-FFF2-40B4-BE49-F238E27FC236}">
-                <a16:creationId xmlns:a16="http://schemas.microsoft.com/office/drawing/2014/main" id="{5B2EDD6F-E1B4-4358-AA98-00A90DB331F9}"/>
+                <a16:creationId xmlns:a16="http://schemas.microsoft.com/office/drawing/2014/main" id="{179B1FE1-0667-479A-B9B5-D0BF30495F20}"/>
               </a:ext>
             </a:extLst>
           </p:cNvPr>
@@ -12309,7 +12509,7 @@
           <p:cNvPr id="11" name="">
             <a:extLst xmlns:a="http://schemas.openxmlformats.org/drawingml/2006/main">
               <a:ext uri="{FF2B5EF4-FFF2-40B4-BE49-F238E27FC236}">
-                <a16:creationId xmlns:a16="http://schemas.microsoft.com/office/drawing/2014/main" id="{2BD49E1D-79CE-41A8-9A6D-23FBF053B506}"/>
+                <a16:creationId xmlns:a16="http://schemas.microsoft.com/office/drawing/2014/main" id="{DE3D6358-98D8-4214-AB31-2864996EE2B0}"/>
               </a:ext>
             </a:extLst>
           </p:cNvPr>
@@ -12341,7 +12541,7 @@
           <p:cNvPr id="12" name="">
             <a:extLst xmlns:a="http://schemas.openxmlformats.org/drawingml/2006/main">
               <a:ext uri="{FF2B5EF4-FFF2-40B4-BE49-F238E27FC236}">
-                <a16:creationId xmlns:a16="http://schemas.microsoft.com/office/drawing/2014/main" id="{AF621D1D-715A-4D04-9E87-9DEEAB9BBAE4}"/>
+                <a16:creationId xmlns:a16="http://schemas.microsoft.com/office/drawing/2014/main" id="{E5152049-1124-4C8D-8530-BB8127ACB1B2}"/>
               </a:ext>
             </a:extLst>
           </p:cNvPr>
@@ -12398,7 +12598,7 @@
           <p:cNvPr id="13" name="">
             <a:extLst xmlns:a="http://schemas.openxmlformats.org/drawingml/2006/main">
               <a:ext uri="{FF2B5EF4-FFF2-40B4-BE49-F238E27FC236}">
-                <a16:creationId xmlns:a16="http://schemas.microsoft.com/office/drawing/2014/main" id="{1FA3F3BD-91D1-413B-A9D4-292F5D7472AA}"/>
+                <a16:creationId xmlns:a16="http://schemas.microsoft.com/office/drawing/2014/main" id="{ED83CA7F-8DDE-45D5-8467-2E701B29E9B6}"/>
               </a:ext>
             </a:extLst>
           </p:cNvPr>
@@ -12455,7 +12655,7 @@
           <p:cNvPr id="14" name="">
             <a:extLst xmlns:a="http://schemas.openxmlformats.org/drawingml/2006/main">
               <a:ext uri="{FF2B5EF4-FFF2-40B4-BE49-F238E27FC236}">
-                <a16:creationId xmlns:a16="http://schemas.microsoft.com/office/drawing/2014/main" id="{1EACE6C5-C84A-4F2C-9AA1-4875AAEBA98D}"/>
+                <a16:creationId xmlns:a16="http://schemas.microsoft.com/office/drawing/2014/main" id="{F87F671B-A8C8-4757-A9B2-D4CCCE6EC9B6}"/>
               </a:ext>
             </a:extLst>
           </p:cNvPr>
@@ -12489,7 +12689,7 @@
           <p:cNvPr id="15" name="">
             <a:extLst xmlns:a="http://schemas.openxmlformats.org/drawingml/2006/main">
               <a:ext uri="{FF2B5EF4-FFF2-40B4-BE49-F238E27FC236}">
-                <a16:creationId xmlns:a16="http://schemas.microsoft.com/office/drawing/2014/main" id="{0BAFFDF7-9242-4D20-A3E5-174ECC1437F5}"/>
+                <a16:creationId xmlns:a16="http://schemas.microsoft.com/office/drawing/2014/main" id="{B21D8DEA-9794-4FA6-A2A2-97AEB950B8A7}"/>
               </a:ext>
             </a:extLst>
           </p:cNvPr>
@@ -12521,7 +12721,7 @@
           <p:cNvPr id="16" name="">
             <a:extLst xmlns:a="http://schemas.openxmlformats.org/drawingml/2006/main">
               <a:ext uri="{FF2B5EF4-FFF2-40B4-BE49-F238E27FC236}">
-                <a16:creationId xmlns:a16="http://schemas.microsoft.com/office/drawing/2014/main" id="{B8FEA369-0FE7-4801-93F9-C0A8CD8CA76D}"/>
+                <a16:creationId xmlns:a16="http://schemas.microsoft.com/office/drawing/2014/main" id="{B3BE3BEB-F637-41A1-BD16-C4979C245E41}"/>
               </a:ext>
             </a:extLst>
           </p:cNvPr>
@@ -12578,7 +12778,7 @@
           <p:cNvPr id="17" name="">
             <a:extLst xmlns:a="http://schemas.openxmlformats.org/drawingml/2006/main">
               <a:ext uri="{FF2B5EF4-FFF2-40B4-BE49-F238E27FC236}">
-                <a16:creationId xmlns:a16="http://schemas.microsoft.com/office/drawing/2014/main" id="{3AA206F5-9C6E-4334-AECD-3B7CB4CCFC05}"/>
+                <a16:creationId xmlns:a16="http://schemas.microsoft.com/office/drawing/2014/main" id="{905DAFD9-9D4A-459B-B1A0-53FC0544873F}"/>
               </a:ext>
             </a:extLst>
           </p:cNvPr>
@@ -12635,7 +12835,7 @@
           <p:cNvPr id="18" name="">
             <a:extLst xmlns:a="http://schemas.openxmlformats.org/drawingml/2006/main">
               <a:ext uri="{FF2B5EF4-FFF2-40B4-BE49-F238E27FC236}">
-                <a16:creationId xmlns:a16="http://schemas.microsoft.com/office/drawing/2014/main" id="{3E21C3AF-5942-4C81-A657-1EDE36440E05}"/>
+                <a16:creationId xmlns:a16="http://schemas.microsoft.com/office/drawing/2014/main" id="{52583DD5-8390-4E11-9B8A-EA320B5E6728}"/>
               </a:ext>
             </a:extLst>
           </p:cNvPr>
@@ -12669,7 +12869,7 @@
           <p:cNvPr id="19" name="">
             <a:extLst xmlns:a="http://schemas.openxmlformats.org/drawingml/2006/main">
               <a:ext uri="{FF2B5EF4-FFF2-40B4-BE49-F238E27FC236}">
-                <a16:creationId xmlns:a16="http://schemas.microsoft.com/office/drawing/2014/main" id="{ACD2EF03-F6B1-4C2B-8EEE-0AAC848AC9F3}"/>
+                <a16:creationId xmlns:a16="http://schemas.microsoft.com/office/drawing/2014/main" id="{649F9179-3F7C-4F5B-B7A2-DA98F9529849}"/>
               </a:ext>
             </a:extLst>
           </p:cNvPr>
@@ -12701,7 +12901,7 @@
           <p:cNvPr id="20" name="">
             <a:extLst xmlns:a="http://schemas.openxmlformats.org/drawingml/2006/main">
               <a:ext uri="{FF2B5EF4-FFF2-40B4-BE49-F238E27FC236}">
-                <a16:creationId xmlns:a16="http://schemas.microsoft.com/office/drawing/2014/main" id="{2B133A3A-915C-4D05-9EEE-0D9DCE7B001E}"/>
+                <a16:creationId xmlns:a16="http://schemas.microsoft.com/office/drawing/2014/main" id="{64AE17D7-A790-4E6D-B188-246A9F36E7A0}"/>
               </a:ext>
             </a:extLst>
           </p:cNvPr>
@@ -12758,7 +12958,7 @@
           <p:cNvPr id="21" name="">
             <a:extLst xmlns:a="http://schemas.openxmlformats.org/drawingml/2006/main">
               <a:ext uri="{FF2B5EF4-FFF2-40B4-BE49-F238E27FC236}">
-                <a16:creationId xmlns:a16="http://schemas.microsoft.com/office/drawing/2014/main" id="{809A2D1E-F9F2-4B96-95D0-AA7C52417423}"/>
+                <a16:creationId xmlns:a16="http://schemas.microsoft.com/office/drawing/2014/main" id="{74855157-A37C-4401-B4F2-81FE59621BA0}"/>
               </a:ext>
             </a:extLst>
           </p:cNvPr>
@@ -12815,7 +13015,7 @@
           <p:cNvPr id="22" name="">
             <a:extLst xmlns:a="http://schemas.openxmlformats.org/drawingml/2006/main">
               <a:ext uri="{FF2B5EF4-FFF2-40B4-BE49-F238E27FC236}">
-                <a16:creationId xmlns:a16="http://schemas.microsoft.com/office/drawing/2014/main" id="{471AFCA3-EB76-440D-A8C2-51342CC42323}"/>
+                <a16:creationId xmlns:a16="http://schemas.microsoft.com/office/drawing/2014/main" id="{C7C1B7E5-8330-45E9-9B04-9126EE6B0F65}"/>
               </a:ext>
             </a:extLst>
           </p:cNvPr>
@@ -12870,7 +13070,7 @@
     </p:spTree>
     <p:extLst>
       <p:ext uri="{BB962C8B-B14F-4D97-AF65-F5344CB8AC3E}">
-        <p14:creationId xmlns:p14="http://schemas.microsoft.com/office/powerpoint/2010/main" val="1355861913"/>
+        <p14:creationId xmlns:p14="http://schemas.microsoft.com/office/powerpoint/2010/main" val="1344401357"/>
       </p:ext>
     </p:extLst>
   </p:cSld>
@@ -13071,7 +13271,7 @@
           <p:cNvPr id="22" name="">
             <a:extLst xmlns:a="http://schemas.openxmlformats.org/drawingml/2006/main">
               <a:ext uri="{FF2B5EF4-FFF2-40B4-BE49-F238E27FC236}">
-                <a16:creationId xmlns:a16="http://schemas.microsoft.com/office/drawing/2014/main" id="{BD98FE7D-5874-48C4-9F1E-6EFFEE329569}"/>
+                <a16:creationId xmlns:a16="http://schemas.microsoft.com/office/drawing/2014/main" id="{7CE02E83-A7D8-415A-A151-2C8C11A662E9}"/>
               </a:ext>
             </a:extLst>
           </p:cNvPr>
@@ -13103,7 +13303,7 @@
           <p:cNvPr id="2" name="">
             <a:extLst xmlns:a="http://schemas.openxmlformats.org/drawingml/2006/main">
               <a:ext uri="{FF2B5EF4-FFF2-40B4-BE49-F238E27FC236}">
-                <a16:creationId xmlns:a16="http://schemas.microsoft.com/office/drawing/2014/main" id="{124CEACA-2EF1-46C7-944B-BE59166B1120}"/>
+                <a16:creationId xmlns:a16="http://schemas.microsoft.com/office/drawing/2014/main" id="{33BBB7D6-826A-40A9-91C4-10367DB090D0}"/>
               </a:ext>
             </a:extLst>
           </p:cNvPr>
@@ -13160,7 +13360,7 @@
           <p:cNvPr id="3" name="">
             <a:extLst xmlns:a="http://schemas.openxmlformats.org/drawingml/2006/main">
               <a:ext uri="{FF2B5EF4-FFF2-40B4-BE49-F238E27FC236}">
-                <a16:creationId xmlns:a16="http://schemas.microsoft.com/office/drawing/2014/main" id="{66F7BF15-C16E-4B37-B44A-142701CAF46D}"/>
+                <a16:creationId xmlns:a16="http://schemas.microsoft.com/office/drawing/2014/main" id="{71F22D4A-6912-4396-B77A-FD2FBF9CF2FE}"/>
               </a:ext>
             </a:extLst>
           </p:cNvPr>
@@ -13192,7 +13392,7 @@
           <p:cNvPr id="4" name="">
             <a:extLst xmlns:a="http://schemas.openxmlformats.org/drawingml/2006/main">
               <a:ext uri="{FF2B5EF4-FFF2-40B4-BE49-F238E27FC236}">
-                <a16:creationId xmlns:a16="http://schemas.microsoft.com/office/drawing/2014/main" id="{1A2B8430-A855-4B11-9296-EFB2D3B72997}"/>
+                <a16:creationId xmlns:a16="http://schemas.microsoft.com/office/drawing/2014/main" id="{91FC6186-A27E-4E1A-B56D-715B8FB33389}"/>
               </a:ext>
             </a:extLst>
           </p:cNvPr>
@@ -13249,7 +13449,7 @@
           <p:cNvPr id="5" name="">
             <a:extLst xmlns:a="http://schemas.openxmlformats.org/drawingml/2006/main">
               <a:ext uri="{FF2B5EF4-FFF2-40B4-BE49-F238E27FC236}">
-                <a16:creationId xmlns:a16="http://schemas.microsoft.com/office/drawing/2014/main" id="{FD244D77-B607-4871-B6F2-824980A9FD6D}"/>
+                <a16:creationId xmlns:a16="http://schemas.microsoft.com/office/drawing/2014/main" id="{007CC825-55FB-4284-A537-6118D9BA9196}"/>
               </a:ext>
             </a:extLst>
           </p:cNvPr>
@@ -13306,7 +13506,7 @@
           <p:cNvPr id="6" name="">
             <a:extLst xmlns:a="http://schemas.openxmlformats.org/drawingml/2006/main">
               <a:ext uri="{FF2B5EF4-FFF2-40B4-BE49-F238E27FC236}">
-                <a16:creationId xmlns:a16="http://schemas.microsoft.com/office/drawing/2014/main" id="{0E64D1EF-7C1F-4EEF-91C0-9B6EB79B7A04}"/>
+                <a16:creationId xmlns:a16="http://schemas.microsoft.com/office/drawing/2014/main" id="{FC43ED14-3E49-4631-9AB6-74F866C1DE15}"/>
               </a:ext>
             </a:extLst>
           </p:cNvPr>
@@ -13363,7 +13563,7 @@
           <p:cNvPr id="7" name="">
             <a:extLst xmlns:a="http://schemas.openxmlformats.org/drawingml/2006/main">
               <a:ext uri="{FF2B5EF4-FFF2-40B4-BE49-F238E27FC236}">
-                <a16:creationId xmlns:a16="http://schemas.microsoft.com/office/drawing/2014/main" id="{C3EE2CDE-AB1D-4302-AA6C-765B3A79BE2F}"/>
+                <a16:creationId xmlns:a16="http://schemas.microsoft.com/office/drawing/2014/main" id="{C4DEDD25-5F8D-43DC-8404-CE1831E15F85}"/>
               </a:ext>
             </a:extLst>
           </p:cNvPr>
@@ -13395,7 +13595,7 @@
           <p:cNvPr id="8" name="">
             <a:extLst xmlns:a="http://schemas.openxmlformats.org/drawingml/2006/main">
               <a:ext uri="{FF2B5EF4-FFF2-40B4-BE49-F238E27FC236}">
-                <a16:creationId xmlns:a16="http://schemas.microsoft.com/office/drawing/2014/main" id="{A376832A-3D44-4FCD-A9A4-C4BDD3AB9865}"/>
+                <a16:creationId xmlns:a16="http://schemas.microsoft.com/office/drawing/2014/main" id="{E1B2DF8C-02E6-43A3-BD80-1756D419299B}"/>
               </a:ext>
             </a:extLst>
           </p:cNvPr>
@@ -13452,7 +13652,7 @@
           <p:cNvPr id="9" name="">
             <a:extLst xmlns:a="http://schemas.openxmlformats.org/drawingml/2006/main">
               <a:ext uri="{FF2B5EF4-FFF2-40B4-BE49-F238E27FC236}">
-                <a16:creationId xmlns:a16="http://schemas.microsoft.com/office/drawing/2014/main" id="{762346D4-E2F3-4BDB-A608-FA425BF2F3F3}"/>
+                <a16:creationId xmlns:a16="http://schemas.microsoft.com/office/drawing/2014/main" id="{4B584EB6-FAE8-40EE-B10C-02740E2C4798}"/>
               </a:ext>
             </a:extLst>
           </p:cNvPr>
@@ -13509,7 +13709,7 @@
           <p:cNvPr id="10" name="">
             <a:extLst xmlns:a="http://schemas.openxmlformats.org/drawingml/2006/main">
               <a:ext uri="{FF2B5EF4-FFF2-40B4-BE49-F238E27FC236}">
-                <a16:creationId xmlns:a16="http://schemas.microsoft.com/office/drawing/2014/main" id="{6FBBCF1F-1DF0-4C76-ABE9-37F9C1573D48}"/>
+                <a16:creationId xmlns:a16="http://schemas.microsoft.com/office/drawing/2014/main" id="{75619E20-F92F-4B91-A108-8D77D0A52182}"/>
               </a:ext>
             </a:extLst>
           </p:cNvPr>
@@ -13543,7 +13743,7 @@
           <p:cNvPr id="11" name="">
             <a:extLst xmlns:a="http://schemas.openxmlformats.org/drawingml/2006/main">
               <a:ext uri="{FF2B5EF4-FFF2-40B4-BE49-F238E27FC236}">
-                <a16:creationId xmlns:a16="http://schemas.microsoft.com/office/drawing/2014/main" id="{2317AF78-B766-403B-B392-C413C1D6B282}"/>
+                <a16:creationId xmlns:a16="http://schemas.microsoft.com/office/drawing/2014/main" id="{F3562FF5-EB0B-43A3-8A81-276D64231294}"/>
               </a:ext>
             </a:extLst>
           </p:cNvPr>
@@ -13575,7 +13775,7 @@
           <p:cNvPr id="12" name="">
             <a:extLst xmlns:a="http://schemas.openxmlformats.org/drawingml/2006/main">
               <a:ext uri="{FF2B5EF4-FFF2-40B4-BE49-F238E27FC236}">
-                <a16:creationId xmlns:a16="http://schemas.microsoft.com/office/drawing/2014/main" id="{F8C30586-C323-4038-B03F-1DEAC9035381}"/>
+                <a16:creationId xmlns:a16="http://schemas.microsoft.com/office/drawing/2014/main" id="{732DE1B8-2A38-4360-B235-6FA2334464E6}"/>
               </a:ext>
             </a:extLst>
           </p:cNvPr>
@@ -13632,7 +13832,7 @@
           <p:cNvPr id="13" name="">
             <a:extLst xmlns:a="http://schemas.openxmlformats.org/drawingml/2006/main">
               <a:ext uri="{FF2B5EF4-FFF2-40B4-BE49-F238E27FC236}">
-                <a16:creationId xmlns:a16="http://schemas.microsoft.com/office/drawing/2014/main" id="{1E654605-53C5-47A3-A1AB-C3A3EFD27E6A}"/>
+                <a16:creationId xmlns:a16="http://schemas.microsoft.com/office/drawing/2014/main" id="{BDD1882F-47AF-4747-87DC-861186D59AF6}"/>
               </a:ext>
             </a:extLst>
           </p:cNvPr>
@@ -13689,7 +13889,7 @@
           <p:cNvPr id="14" name="">
             <a:extLst xmlns:a="http://schemas.openxmlformats.org/drawingml/2006/main">
               <a:ext uri="{FF2B5EF4-FFF2-40B4-BE49-F238E27FC236}">
-                <a16:creationId xmlns:a16="http://schemas.microsoft.com/office/drawing/2014/main" id="{2D28EF4E-4BC1-4934-9F47-BE1D28FE508D}"/>
+                <a16:creationId xmlns:a16="http://schemas.microsoft.com/office/drawing/2014/main" id="{B254256C-D565-4414-955D-5143F01C79EA}"/>
               </a:ext>
             </a:extLst>
           </p:cNvPr>
@@ -13723,7 +13923,7 @@
           <p:cNvPr id="15" name="">
             <a:extLst xmlns:a="http://schemas.openxmlformats.org/drawingml/2006/main">
               <a:ext uri="{FF2B5EF4-FFF2-40B4-BE49-F238E27FC236}">
-                <a16:creationId xmlns:a16="http://schemas.microsoft.com/office/drawing/2014/main" id="{3184BBD2-228F-4A83-873C-BB2DC8A4CF9F}"/>
+                <a16:creationId xmlns:a16="http://schemas.microsoft.com/office/drawing/2014/main" id="{5A506252-F3ED-432E-9FA3-8ADD7B853833}"/>
               </a:ext>
             </a:extLst>
           </p:cNvPr>
@@ -13755,7 +13955,7 @@
           <p:cNvPr id="16" name="">
             <a:extLst xmlns:a="http://schemas.openxmlformats.org/drawingml/2006/main">
               <a:ext uri="{FF2B5EF4-FFF2-40B4-BE49-F238E27FC236}">
-                <a16:creationId xmlns:a16="http://schemas.microsoft.com/office/drawing/2014/main" id="{430594BF-96BA-4ED0-B505-62FB0E2FD503}"/>
+                <a16:creationId xmlns:a16="http://schemas.microsoft.com/office/drawing/2014/main" id="{4F965270-A36A-48A0-9A05-653F6D02ECEC}"/>
               </a:ext>
             </a:extLst>
           </p:cNvPr>
@@ -13812,7 +14012,7 @@
           <p:cNvPr id="17" name="">
             <a:extLst xmlns:a="http://schemas.openxmlformats.org/drawingml/2006/main">
               <a:ext uri="{FF2B5EF4-FFF2-40B4-BE49-F238E27FC236}">
-                <a16:creationId xmlns:a16="http://schemas.microsoft.com/office/drawing/2014/main" id="{B19BB8AE-301F-427E-82B1-D6750425BE3B}"/>
+                <a16:creationId xmlns:a16="http://schemas.microsoft.com/office/drawing/2014/main" id="{CDA61C6A-DB92-46D0-90AB-BE21ECBDE003}"/>
               </a:ext>
             </a:extLst>
           </p:cNvPr>
@@ -13869,7 +14069,7 @@
           <p:cNvPr id="18" name="">
             <a:extLst xmlns:a="http://schemas.openxmlformats.org/drawingml/2006/main">
               <a:ext uri="{FF2B5EF4-FFF2-40B4-BE49-F238E27FC236}">
-                <a16:creationId xmlns:a16="http://schemas.microsoft.com/office/drawing/2014/main" id="{5E50D30A-366B-4B65-BFFD-E9934A375A03}"/>
+                <a16:creationId xmlns:a16="http://schemas.microsoft.com/office/drawing/2014/main" id="{2FDC0551-2ACE-4BE3-B2A1-64B50EC51279}"/>
               </a:ext>
             </a:extLst>
           </p:cNvPr>
@@ -13903,7 +14103,7 @@
           <p:cNvPr id="19" name="">
             <a:extLst xmlns:a="http://schemas.openxmlformats.org/drawingml/2006/main">
               <a:ext uri="{FF2B5EF4-FFF2-40B4-BE49-F238E27FC236}">
-                <a16:creationId xmlns:a16="http://schemas.microsoft.com/office/drawing/2014/main" id="{424F3E14-967C-4DCA-9CE3-5CC4669E4186}"/>
+                <a16:creationId xmlns:a16="http://schemas.microsoft.com/office/drawing/2014/main" id="{07308895-A130-4586-B93A-7E00D018EEEF}"/>
               </a:ext>
             </a:extLst>
           </p:cNvPr>
@@ -13935,7 +14135,7 @@
           <p:cNvPr id="20" name="">
             <a:extLst xmlns:a="http://schemas.openxmlformats.org/drawingml/2006/main">
               <a:ext uri="{FF2B5EF4-FFF2-40B4-BE49-F238E27FC236}">
-                <a16:creationId xmlns:a16="http://schemas.microsoft.com/office/drawing/2014/main" id="{BF756B5D-223D-43C2-BF90-DE0CC899D408}"/>
+                <a16:creationId xmlns:a16="http://schemas.microsoft.com/office/drawing/2014/main" id="{4C798416-41CA-40B7-A022-C754F585EBC5}"/>
               </a:ext>
             </a:extLst>
           </p:cNvPr>
@@ -13992,7 +14192,7 @@
           <p:cNvPr id="21" name="">
             <a:extLst xmlns:a="http://schemas.openxmlformats.org/drawingml/2006/main">
               <a:ext uri="{FF2B5EF4-FFF2-40B4-BE49-F238E27FC236}">
-                <a16:creationId xmlns:a16="http://schemas.microsoft.com/office/drawing/2014/main" id="{85C24D72-417B-4DBB-9629-ED805A9135F5}"/>
+                <a16:creationId xmlns:a16="http://schemas.microsoft.com/office/drawing/2014/main" id="{9430BF03-FD40-445D-B524-CE522604260C}"/>
               </a:ext>
             </a:extLst>
           </p:cNvPr>
@@ -14047,7 +14247,7 @@
     </p:spTree>
     <p:extLst>
       <p:ext uri="{BB962C8B-B14F-4D97-AF65-F5344CB8AC3E}">
-        <p14:creationId xmlns:p14="http://schemas.microsoft.com/office/powerpoint/2010/main" val="229386257"/>
+        <p14:creationId xmlns:p14="http://schemas.microsoft.com/office/powerpoint/2010/main" val="1771817174"/>
       </p:ext>
     </p:extLst>
   </p:cSld>
